--- a/2. EventLoop/JavaScript_Event_Loop.pptx
+++ b/2. EventLoop/JavaScript_Event_Loop.pptx
@@ -5,7 +5,7 @@
     <p:sldMasterId id="2147483648" r:id="rId1"/>
   </p:sldMasterIdLst>
   <p:notesMasterIdLst>
-    <p:notesMasterId r:id="rId14"/>
+    <p:notesMasterId r:id="rId16"/>
   </p:notesMasterIdLst>
   <p:sldIdLst>
     <p:sldId id="256" r:id="rId2"/>
@@ -14,12 +14,14 @@
     <p:sldId id="259" r:id="rId5"/>
     <p:sldId id="260" r:id="rId6"/>
     <p:sldId id="270" r:id="rId7"/>
-    <p:sldId id="263" r:id="rId8"/>
-    <p:sldId id="264" r:id="rId9"/>
-    <p:sldId id="265" r:id="rId10"/>
-    <p:sldId id="266" r:id="rId11"/>
-    <p:sldId id="267" r:id="rId12"/>
-    <p:sldId id="268" r:id="rId13"/>
+    <p:sldId id="271" r:id="rId8"/>
+    <p:sldId id="272" r:id="rId9"/>
+    <p:sldId id="263" r:id="rId10"/>
+    <p:sldId id="264" r:id="rId11"/>
+    <p:sldId id="265" r:id="rId12"/>
+    <p:sldId id="266" r:id="rId13"/>
+    <p:sldId id="267" r:id="rId14"/>
+    <p:sldId id="268" r:id="rId15"/>
   </p:sldIdLst>
   <p:sldSz cx="12192000" cy="6858000"/>
   <p:notesSz cx="6858000" cy="12192000"/>
@@ -409,7 +411,7 @@
           <a:p>
             <a:fld id="{F7021451-1387-4CA6-816F-3879F97B5CBC}" type="slidenum">
               <a:rPr lang="en-US"/>
-              <a:t>11</a:t>
+              <a:t>13</a:t>
             </a:fld>
             <a:endParaRPr lang="en-US"/>
           </a:p>
@@ -493,7 +495,7 @@
           <a:p>
             <a:fld id="{F7021451-1387-4CA6-816F-3879F97B5CBC}" type="slidenum">
               <a:rPr lang="en-US"/>
-              <a:t>12</a:t>
+              <a:t>14</a:t>
             </a:fld>
             <a:endParaRPr lang="en-US"/>
           </a:p>
@@ -913,7 +915,7 @@
           <a:p>
             <a:fld id="{F7021451-1387-4CA6-816F-3879F97B5CBC}" type="slidenum">
               <a:rPr lang="en-US"/>
-              <a:t>7</a:t>
+              <a:t>9</a:t>
             </a:fld>
             <a:endParaRPr lang="en-US"/>
           </a:p>
@@ -997,7 +999,7 @@
           <a:p>
             <a:fld id="{F7021451-1387-4CA6-816F-3879F97B5CBC}" type="slidenum">
               <a:rPr lang="en-US"/>
-              <a:t>8</a:t>
+              <a:t>10</a:t>
             </a:fld>
             <a:endParaRPr lang="en-US"/>
           </a:p>
@@ -1081,7 +1083,7 @@
           <a:p>
             <a:fld id="{F7021451-1387-4CA6-816F-3879F97B5CBC}" type="slidenum">
               <a:rPr lang="en-US"/>
-              <a:t>9</a:t>
+              <a:t>11</a:t>
             </a:fld>
             <a:endParaRPr lang="en-US"/>
           </a:p>
@@ -1165,7 +1167,7 @@
           <a:p>
             <a:fld id="{F7021451-1387-4CA6-816F-3879F97B5CBC}" type="slidenum">
               <a:rPr lang="en-US"/>
-              <a:t>10</a:t>
+              <a:t>12</a:t>
             </a:fld>
             <a:endParaRPr lang="en-US"/>
           </a:p>
@@ -1688,6 +1690,1697 @@
 
 <file path=ppt/slides/slide10.xml><?xml version="1.0" encoding="utf-8"?>
 <p:sld xmlns:a="http://schemas.openxmlformats.org/drawingml/2006/main" xmlns:r="http://schemas.openxmlformats.org/officeDocument/2006/relationships" xmlns:p="http://schemas.openxmlformats.org/presentationml/2006/main">
+  <p:cSld name="Slide 9">
+    <p:bg>
+      <p:bgPr>
+        <a:solidFill>
+          <a:srgbClr val="F7F7F5"/>
+        </a:solidFill>
+        <a:effectLst/>
+      </p:bgPr>
+    </p:bg>
+    <p:spTree>
+      <p:nvGrpSpPr>
+        <p:cNvPr id="1" name=""/>
+        <p:cNvGrpSpPr/>
+        <p:nvPr/>
+      </p:nvGrpSpPr>
+      <p:grpSpPr>
+        <a:xfrm>
+          <a:off x="0" y="0"/>
+          <a:ext cx="0" cy="0"/>
+          <a:chOff x="0" y="0"/>
+          <a:chExt cx="0" cy="0"/>
+        </a:xfrm>
+      </p:grpSpPr>
+      <p:sp>
+        <p:nvSpPr>
+          <p:cNvPr id="2" name="Text 0"/>
+          <p:cNvSpPr/>
+          <p:nvPr/>
+        </p:nvSpPr>
+        <p:spPr>
+          <a:xfrm>
+            <a:off x="548640" y="365760"/>
+            <a:ext cx="7315200" cy="365760"/>
+          </a:xfrm>
+          <a:prstGeom prst="rect">
+            <a:avLst/>
+          </a:prstGeom>
+          <a:noFill/>
+          <a:ln/>
+        </p:spPr>
+        <p:txBody>
+          <a:bodyPr wrap="square" rtlCol="0" anchor="ctr"/>
+          <a:lstStyle/>
+          <a:p>
+            <a:pPr marL="0" indent="0">
+              <a:buNone/>
+            </a:pPr>
+            <a:r>
+              <a:rPr lang="en-US" sz="1200" b="1" kern="0" spc="200" dirty="0">
+                <a:solidFill>
+                  <a:srgbClr val="2EC4B6"/>
+                </a:solidFill>
+                <a:latin typeface="Calibri" pitchFamily="34" charset="0"/>
+                <a:ea typeface="Calibri" pitchFamily="34" charset="-122"/>
+                <a:cs typeface="Calibri" pitchFamily="34" charset="-120"/>
+              </a:rPr>
+              <a:t>MEMORIZE THESE</a:t>
+            </a:r>
+            <a:endParaRPr lang="en-US" sz="1200" dirty="0"/>
+          </a:p>
+        </p:txBody>
+      </p:sp>
+      <p:sp>
+        <p:nvSpPr>
+          <p:cNvPr id="3" name="Text 1"/>
+          <p:cNvSpPr/>
+          <p:nvPr/>
+        </p:nvSpPr>
+        <p:spPr>
+          <a:xfrm>
+            <a:off x="548640" y="685800"/>
+            <a:ext cx="10515600" cy="822960"/>
+          </a:xfrm>
+          <a:prstGeom prst="rect">
+            <a:avLst/>
+          </a:prstGeom>
+          <a:noFill/>
+          <a:ln/>
+        </p:spPr>
+        <p:txBody>
+          <a:bodyPr wrap="square" rtlCol="0" anchor="ctr"/>
+          <a:lstStyle/>
+          <a:p>
+            <a:pPr marL="0" indent="0">
+              <a:buNone/>
+            </a:pPr>
+            <a:r>
+              <a:rPr lang="en-US" sz="3000" b="1" dirty="0">
+                <a:solidFill>
+                  <a:srgbClr val="1B1F3B"/>
+                </a:solidFill>
+                <a:latin typeface="Bookman Old Style" pitchFamily="34" charset="0"/>
+                <a:ea typeface="Bookman Old Style" pitchFamily="34" charset="-122"/>
+                <a:cs typeface="Bookman Old Style" pitchFamily="34" charset="-120"/>
+              </a:rPr>
+              <a:t>The Event Loop Rules</a:t>
+            </a:r>
+            <a:endParaRPr lang="en-US" sz="3000" dirty="0"/>
+          </a:p>
+        </p:txBody>
+      </p:sp>
+      <p:sp>
+        <p:nvSpPr>
+          <p:cNvPr id="4" name="Shape 2"/>
+          <p:cNvSpPr/>
+          <p:nvPr/>
+        </p:nvSpPr>
+        <p:spPr>
+          <a:xfrm>
+            <a:off x="548640" y="1691640"/>
+            <a:ext cx="457200" cy="457200"/>
+          </a:xfrm>
+          <a:prstGeom prst="roundRect">
+            <a:avLst>
+              <a:gd name="adj" fmla="val 16000"/>
+            </a:avLst>
+          </a:prstGeom>
+          <a:solidFill>
+            <a:srgbClr val="1B1F3B"/>
+          </a:solidFill>
+          <a:ln/>
+        </p:spPr>
+      </p:sp>
+      <p:sp>
+        <p:nvSpPr>
+          <p:cNvPr id="5" name="Text 3"/>
+          <p:cNvSpPr/>
+          <p:nvPr/>
+        </p:nvSpPr>
+        <p:spPr>
+          <a:xfrm>
+            <a:off x="548640" y="1691640"/>
+            <a:ext cx="457200" cy="457200"/>
+          </a:xfrm>
+          <a:prstGeom prst="rect">
+            <a:avLst/>
+          </a:prstGeom>
+          <a:noFill/>
+          <a:ln/>
+        </p:spPr>
+        <p:txBody>
+          <a:bodyPr wrap="square" rtlCol="0" anchor="ctr"/>
+          <a:lstStyle/>
+          <a:p>
+            <a:pPr marL="0" indent="0" algn="ctr">
+              <a:buNone/>
+            </a:pPr>
+            <a:r>
+              <a:rPr lang="en-US" sz="1500" b="1" dirty="0">
+                <a:solidFill>
+                  <a:srgbClr val="FFFFFF"/>
+                </a:solidFill>
+                <a:latin typeface="Calibri" pitchFamily="34" charset="0"/>
+                <a:ea typeface="Calibri" pitchFamily="34" charset="-122"/>
+                <a:cs typeface="Calibri" pitchFamily="34" charset="-120"/>
+              </a:rPr>
+              <a:t>1</a:t>
+            </a:r>
+            <a:endParaRPr lang="en-US" sz="1500" dirty="0"/>
+          </a:p>
+        </p:txBody>
+      </p:sp>
+      <p:sp>
+        <p:nvSpPr>
+          <p:cNvPr id="6" name="Text 4"/>
+          <p:cNvSpPr/>
+          <p:nvPr/>
+        </p:nvSpPr>
+        <p:spPr>
+          <a:xfrm>
+            <a:off x="1188720" y="1664208"/>
+            <a:ext cx="10424160" cy="548640"/>
+          </a:xfrm>
+          <a:prstGeom prst="rect">
+            <a:avLst/>
+          </a:prstGeom>
+          <a:noFill/>
+          <a:ln/>
+        </p:spPr>
+        <p:txBody>
+          <a:bodyPr wrap="square" rtlCol="0" anchor="t"/>
+          <a:lstStyle/>
+          <a:p>
+            <a:pPr marL="0" indent="0">
+              <a:buNone/>
+            </a:pPr>
+            <a:r>
+              <a:rPr lang="en-US" sz="1400" dirty="0">
+                <a:solidFill>
+                  <a:srgbClr val="1B1F3B"/>
+                </a:solidFill>
+                <a:latin typeface="Calibri" pitchFamily="34" charset="0"/>
+                <a:ea typeface="Calibri" pitchFamily="34" charset="-122"/>
+                <a:cs typeface="Calibri" pitchFamily="34" charset="-120"/>
+              </a:rPr>
+              <a:t>Call stack code always runs first, in strict LIFO order.</a:t>
+            </a:r>
+            <a:endParaRPr lang="en-US" sz="1400" dirty="0"/>
+          </a:p>
+        </p:txBody>
+      </p:sp>
+      <p:sp>
+        <p:nvSpPr>
+          <p:cNvPr id="7" name="Shape 5"/>
+          <p:cNvSpPr/>
+          <p:nvPr/>
+        </p:nvSpPr>
+        <p:spPr>
+          <a:xfrm>
+            <a:off x="548640" y="2377440"/>
+            <a:ext cx="457200" cy="457200"/>
+          </a:xfrm>
+          <a:prstGeom prst="roundRect">
+            <a:avLst>
+              <a:gd name="adj" fmla="val 16000"/>
+            </a:avLst>
+          </a:prstGeom>
+          <a:solidFill>
+            <a:srgbClr val="1B1F3B"/>
+          </a:solidFill>
+          <a:ln/>
+        </p:spPr>
+      </p:sp>
+      <p:sp>
+        <p:nvSpPr>
+          <p:cNvPr id="8" name="Text 6"/>
+          <p:cNvSpPr/>
+          <p:nvPr/>
+        </p:nvSpPr>
+        <p:spPr>
+          <a:xfrm>
+            <a:off x="548640" y="2377440"/>
+            <a:ext cx="457200" cy="457200"/>
+          </a:xfrm>
+          <a:prstGeom prst="rect">
+            <a:avLst/>
+          </a:prstGeom>
+          <a:noFill/>
+          <a:ln/>
+        </p:spPr>
+        <p:txBody>
+          <a:bodyPr wrap="square" rtlCol="0" anchor="ctr"/>
+          <a:lstStyle/>
+          <a:p>
+            <a:pPr marL="0" indent="0" algn="ctr">
+              <a:buNone/>
+            </a:pPr>
+            <a:r>
+              <a:rPr lang="en-US" sz="1500" b="1" dirty="0">
+                <a:solidFill>
+                  <a:srgbClr val="FFFFFF"/>
+                </a:solidFill>
+                <a:latin typeface="Calibri" pitchFamily="34" charset="0"/>
+                <a:ea typeface="Calibri" pitchFamily="34" charset="-122"/>
+                <a:cs typeface="Calibri" pitchFamily="34" charset="-120"/>
+              </a:rPr>
+              <a:t>2</a:t>
+            </a:r>
+            <a:endParaRPr lang="en-US" sz="1500" dirty="0"/>
+          </a:p>
+        </p:txBody>
+      </p:sp>
+      <p:sp>
+        <p:nvSpPr>
+          <p:cNvPr id="9" name="Text 7"/>
+          <p:cNvSpPr/>
+          <p:nvPr/>
+        </p:nvSpPr>
+        <p:spPr>
+          <a:xfrm>
+            <a:off x="1188720" y="2350008"/>
+            <a:ext cx="10424160" cy="548640"/>
+          </a:xfrm>
+          <a:prstGeom prst="rect">
+            <a:avLst/>
+          </a:prstGeom>
+          <a:noFill/>
+          <a:ln/>
+        </p:spPr>
+        <p:txBody>
+          <a:bodyPr wrap="square" rtlCol="0" anchor="t"/>
+          <a:lstStyle/>
+          <a:p>
+            <a:pPr marL="0" indent="0">
+              <a:buNone/>
+            </a:pPr>
+            <a:r>
+              <a:rPr lang="en-US" sz="1400" dirty="0">
+                <a:solidFill>
+                  <a:srgbClr val="1B1F3B"/>
+                </a:solidFill>
+                <a:latin typeface="Calibri" pitchFamily="34" charset="0"/>
+                <a:ea typeface="Calibri" pitchFamily="34" charset="-122"/>
+                <a:cs typeface="Calibri" pitchFamily="34" charset="-120"/>
+              </a:rPr>
+              <a:t>Web API tasks (timers, fetch, events) never enter the call stack directly — their callbacks queue up instead.</a:t>
+            </a:r>
+            <a:endParaRPr lang="en-US" sz="1400" dirty="0"/>
+          </a:p>
+        </p:txBody>
+      </p:sp>
+      <p:sp>
+        <p:nvSpPr>
+          <p:cNvPr id="10" name="Shape 8"/>
+          <p:cNvSpPr/>
+          <p:nvPr/>
+        </p:nvSpPr>
+        <p:spPr>
+          <a:xfrm>
+            <a:off x="548640" y="3063240"/>
+            <a:ext cx="457200" cy="457200"/>
+          </a:xfrm>
+          <a:prstGeom prst="roundRect">
+            <a:avLst>
+              <a:gd name="adj" fmla="val 16000"/>
+            </a:avLst>
+          </a:prstGeom>
+          <a:solidFill>
+            <a:srgbClr val="1B1F3B"/>
+          </a:solidFill>
+          <a:ln/>
+        </p:spPr>
+      </p:sp>
+      <p:sp>
+        <p:nvSpPr>
+          <p:cNvPr id="11" name="Text 9"/>
+          <p:cNvSpPr/>
+          <p:nvPr/>
+        </p:nvSpPr>
+        <p:spPr>
+          <a:xfrm>
+            <a:off x="548640" y="3063240"/>
+            <a:ext cx="457200" cy="457200"/>
+          </a:xfrm>
+          <a:prstGeom prst="rect">
+            <a:avLst/>
+          </a:prstGeom>
+          <a:noFill/>
+          <a:ln/>
+        </p:spPr>
+        <p:txBody>
+          <a:bodyPr wrap="square" rtlCol="0" anchor="ctr"/>
+          <a:lstStyle/>
+          <a:p>
+            <a:pPr marL="0" indent="0" algn="ctr">
+              <a:buNone/>
+            </a:pPr>
+            <a:r>
+              <a:rPr lang="en-US" sz="1500" b="1" dirty="0">
+                <a:solidFill>
+                  <a:srgbClr val="FFFFFF"/>
+                </a:solidFill>
+                <a:latin typeface="Calibri" pitchFamily="34" charset="0"/>
+                <a:ea typeface="Calibri" pitchFamily="34" charset="-122"/>
+                <a:cs typeface="Calibri" pitchFamily="34" charset="-120"/>
+              </a:rPr>
+              <a:t>3</a:t>
+            </a:r>
+            <a:endParaRPr lang="en-US" sz="1500" dirty="0"/>
+          </a:p>
+        </p:txBody>
+      </p:sp>
+      <p:sp>
+        <p:nvSpPr>
+          <p:cNvPr id="12" name="Text 10"/>
+          <p:cNvSpPr/>
+          <p:nvPr/>
+        </p:nvSpPr>
+        <p:spPr>
+          <a:xfrm>
+            <a:off x="1188720" y="3035808"/>
+            <a:ext cx="10424160" cy="548640"/>
+          </a:xfrm>
+          <a:prstGeom prst="rect">
+            <a:avLst/>
+          </a:prstGeom>
+          <a:noFill/>
+          <a:ln/>
+        </p:spPr>
+        <p:txBody>
+          <a:bodyPr wrap="square" rtlCol="0" anchor="t"/>
+          <a:lstStyle/>
+          <a:p>
+            <a:pPr marL="0" indent="0">
+              <a:buNone/>
+            </a:pPr>
+            <a:r>
+              <a:rPr lang="en-US" sz="1400" dirty="0">
+                <a:solidFill>
+                  <a:srgbClr val="1B1F3B"/>
+                </a:solidFill>
+                <a:latin typeface="Calibri" pitchFamily="34" charset="0"/>
+                <a:ea typeface="Calibri" pitchFamily="34" charset="-122"/>
+                <a:cs typeface="Calibri" pitchFamily="34" charset="-120"/>
+              </a:rPr>
+              <a:t>setTimeout / event callbacks → Callback Queue (FIFO). Promise handlers → Job Queue (FIFO).</a:t>
+            </a:r>
+            <a:endParaRPr lang="en-US" sz="1400" dirty="0"/>
+          </a:p>
+        </p:txBody>
+      </p:sp>
+      <p:sp>
+        <p:nvSpPr>
+          <p:cNvPr id="13" name="Shape 11"/>
+          <p:cNvSpPr/>
+          <p:nvPr/>
+        </p:nvSpPr>
+        <p:spPr>
+          <a:xfrm>
+            <a:off x="548640" y="3749040"/>
+            <a:ext cx="457200" cy="457200"/>
+          </a:xfrm>
+          <a:prstGeom prst="roundRect">
+            <a:avLst>
+              <a:gd name="adj" fmla="val 16000"/>
+            </a:avLst>
+          </a:prstGeom>
+          <a:solidFill>
+            <a:srgbClr val="1B1F3B"/>
+          </a:solidFill>
+          <a:ln/>
+        </p:spPr>
+      </p:sp>
+      <p:sp>
+        <p:nvSpPr>
+          <p:cNvPr id="14" name="Text 12"/>
+          <p:cNvSpPr/>
+          <p:nvPr/>
+        </p:nvSpPr>
+        <p:spPr>
+          <a:xfrm>
+            <a:off x="548640" y="3749040"/>
+            <a:ext cx="457200" cy="457200"/>
+          </a:xfrm>
+          <a:prstGeom prst="rect">
+            <a:avLst/>
+          </a:prstGeom>
+          <a:noFill/>
+          <a:ln/>
+        </p:spPr>
+        <p:txBody>
+          <a:bodyPr wrap="square" rtlCol="0" anchor="ctr"/>
+          <a:lstStyle/>
+          <a:p>
+            <a:pPr marL="0" indent="0" algn="ctr">
+              <a:buNone/>
+            </a:pPr>
+            <a:r>
+              <a:rPr lang="en-US" sz="1500" b="1" dirty="0">
+                <a:solidFill>
+                  <a:srgbClr val="FFFFFF"/>
+                </a:solidFill>
+                <a:latin typeface="Calibri" pitchFamily="34" charset="0"/>
+                <a:ea typeface="Calibri" pitchFamily="34" charset="-122"/>
+                <a:cs typeface="Calibri" pitchFamily="34" charset="-120"/>
+              </a:rPr>
+              <a:t>4</a:t>
+            </a:r>
+            <a:endParaRPr lang="en-US" sz="1500" dirty="0"/>
+          </a:p>
+        </p:txBody>
+      </p:sp>
+      <p:sp>
+        <p:nvSpPr>
+          <p:cNvPr id="15" name="Text 13"/>
+          <p:cNvSpPr/>
+          <p:nvPr/>
+        </p:nvSpPr>
+        <p:spPr>
+          <a:xfrm>
+            <a:off x="1188720" y="3721608"/>
+            <a:ext cx="10424160" cy="548640"/>
+          </a:xfrm>
+          <a:prstGeom prst="rect">
+            <a:avLst/>
+          </a:prstGeom>
+          <a:noFill/>
+          <a:ln/>
+        </p:spPr>
+        <p:txBody>
+          <a:bodyPr wrap="square" rtlCol="0" anchor="t"/>
+          <a:lstStyle/>
+          <a:p>
+            <a:pPr marL="0" indent="0">
+              <a:buNone/>
+            </a:pPr>
+            <a:r>
+              <a:rPr lang="en-US" sz="1400" dirty="0">
+                <a:solidFill>
+                  <a:srgbClr val="1B1F3B"/>
+                </a:solidFill>
+                <a:latin typeface="Calibri" pitchFamily="34" charset="0"/>
+                <a:ea typeface="Calibri" pitchFamily="34" charset="-122"/>
+                <a:cs typeface="Calibri" pitchFamily="34" charset="-120"/>
+              </a:rPr>
+              <a:t>The Event Loop acts only when the call stack is empty.</a:t>
+            </a:r>
+            <a:endParaRPr lang="en-US" sz="1400" dirty="0"/>
+          </a:p>
+        </p:txBody>
+      </p:sp>
+      <p:sp>
+        <p:nvSpPr>
+          <p:cNvPr id="16" name="Shape 14"/>
+          <p:cNvSpPr/>
+          <p:nvPr/>
+        </p:nvSpPr>
+        <p:spPr>
+          <a:xfrm>
+            <a:off x="548640" y="4434840"/>
+            <a:ext cx="457200" cy="457200"/>
+          </a:xfrm>
+          <a:prstGeom prst="roundRect">
+            <a:avLst>
+              <a:gd name="adj" fmla="val 16000"/>
+            </a:avLst>
+          </a:prstGeom>
+          <a:solidFill>
+            <a:srgbClr val="F0DB4F"/>
+          </a:solidFill>
+          <a:ln/>
+        </p:spPr>
+      </p:sp>
+      <p:sp>
+        <p:nvSpPr>
+          <p:cNvPr id="17" name="Text 15"/>
+          <p:cNvSpPr/>
+          <p:nvPr/>
+        </p:nvSpPr>
+        <p:spPr>
+          <a:xfrm>
+            <a:off x="548640" y="4434840"/>
+            <a:ext cx="457200" cy="457200"/>
+          </a:xfrm>
+          <a:prstGeom prst="rect">
+            <a:avLst/>
+          </a:prstGeom>
+          <a:noFill/>
+          <a:ln/>
+        </p:spPr>
+        <p:txBody>
+          <a:bodyPr wrap="square" rtlCol="0" anchor="ctr"/>
+          <a:lstStyle/>
+          <a:p>
+            <a:pPr marL="0" indent="0" algn="ctr">
+              <a:buNone/>
+            </a:pPr>
+            <a:r>
+              <a:rPr lang="en-US" sz="1500" b="1" dirty="0">
+                <a:solidFill>
+                  <a:srgbClr val="1B1F3B"/>
+                </a:solidFill>
+                <a:latin typeface="Calibri" pitchFamily="34" charset="0"/>
+                <a:ea typeface="Calibri" pitchFamily="34" charset="-122"/>
+                <a:cs typeface="Calibri" pitchFamily="34" charset="-120"/>
+              </a:rPr>
+              <a:t>5</a:t>
+            </a:r>
+            <a:endParaRPr lang="en-US" sz="1500" dirty="0"/>
+          </a:p>
+        </p:txBody>
+      </p:sp>
+      <p:sp>
+        <p:nvSpPr>
+          <p:cNvPr id="18" name="Text 16"/>
+          <p:cNvSpPr/>
+          <p:nvPr/>
+        </p:nvSpPr>
+        <p:spPr>
+          <a:xfrm>
+            <a:off x="1188720" y="4407408"/>
+            <a:ext cx="10424160" cy="548640"/>
+          </a:xfrm>
+          <a:prstGeom prst="rect">
+            <a:avLst/>
+          </a:prstGeom>
+          <a:noFill/>
+          <a:ln/>
+        </p:spPr>
+        <p:txBody>
+          <a:bodyPr wrap="square" rtlCol="0" anchor="t"/>
+          <a:lstStyle/>
+          <a:p>
+            <a:pPr marL="0" indent="0">
+              <a:buNone/>
+            </a:pPr>
+            <a:r>
+              <a:rPr lang="en-US" sz="1400" dirty="0">
+                <a:solidFill>
+                  <a:srgbClr val="1B1F3B"/>
+                </a:solidFill>
+                <a:latin typeface="Calibri" pitchFamily="34" charset="0"/>
+                <a:ea typeface="Calibri" pitchFamily="34" charset="-122"/>
+                <a:cs typeface="Calibri" pitchFamily="34" charset="-120"/>
+              </a:rPr>
+              <a:t>If both queues have items: the Job Queue always goes first.</a:t>
+            </a:r>
+            <a:endParaRPr lang="en-US" sz="1400" dirty="0"/>
+          </a:p>
+        </p:txBody>
+      </p:sp>
+      <p:sp>
+        <p:nvSpPr>
+          <p:cNvPr id="19" name="Shape 17"/>
+          <p:cNvSpPr/>
+          <p:nvPr/>
+        </p:nvSpPr>
+        <p:spPr>
+          <a:xfrm>
+            <a:off x="548640" y="5120640"/>
+            <a:ext cx="457200" cy="457200"/>
+          </a:xfrm>
+          <a:prstGeom prst="roundRect">
+            <a:avLst>
+              <a:gd name="adj" fmla="val 16000"/>
+            </a:avLst>
+          </a:prstGeom>
+          <a:solidFill>
+            <a:srgbClr val="F0DB4F"/>
+          </a:solidFill>
+          <a:ln/>
+        </p:spPr>
+      </p:sp>
+      <p:sp>
+        <p:nvSpPr>
+          <p:cNvPr id="20" name="Text 18"/>
+          <p:cNvSpPr/>
+          <p:nvPr/>
+        </p:nvSpPr>
+        <p:spPr>
+          <a:xfrm>
+            <a:off x="548640" y="5120640"/>
+            <a:ext cx="457200" cy="457200"/>
+          </a:xfrm>
+          <a:prstGeom prst="rect">
+            <a:avLst/>
+          </a:prstGeom>
+          <a:noFill/>
+          <a:ln/>
+        </p:spPr>
+        <p:txBody>
+          <a:bodyPr wrap="square" rtlCol="0" anchor="ctr"/>
+          <a:lstStyle/>
+          <a:p>
+            <a:pPr marL="0" indent="0" algn="ctr">
+              <a:buNone/>
+            </a:pPr>
+            <a:r>
+              <a:rPr lang="en-US" sz="1500" b="1" dirty="0">
+                <a:solidFill>
+                  <a:srgbClr val="1B1F3B"/>
+                </a:solidFill>
+                <a:latin typeface="Calibri" pitchFamily="34" charset="0"/>
+                <a:ea typeface="Calibri" pitchFamily="34" charset="-122"/>
+                <a:cs typeface="Calibri" pitchFamily="34" charset="-120"/>
+              </a:rPr>
+              <a:t>6</a:t>
+            </a:r>
+            <a:endParaRPr lang="en-US" sz="1500" dirty="0"/>
+          </a:p>
+        </p:txBody>
+      </p:sp>
+      <p:sp>
+        <p:nvSpPr>
+          <p:cNvPr id="21" name="Text 19"/>
+          <p:cNvSpPr/>
+          <p:nvPr/>
+        </p:nvSpPr>
+        <p:spPr>
+          <a:xfrm>
+            <a:off x="1188720" y="5093208"/>
+            <a:ext cx="10424160" cy="548640"/>
+          </a:xfrm>
+          <a:prstGeom prst="rect">
+            <a:avLst/>
+          </a:prstGeom>
+          <a:noFill/>
+          <a:ln/>
+        </p:spPr>
+        <p:txBody>
+          <a:bodyPr wrap="square" rtlCol="0" anchor="t"/>
+          <a:lstStyle/>
+          <a:p>
+            <a:pPr marL="0" indent="0">
+              <a:buNone/>
+            </a:pPr>
+            <a:r>
+              <a:rPr lang="en-US" sz="1400" dirty="0">
+                <a:solidFill>
+                  <a:srgbClr val="1B1F3B"/>
+                </a:solidFill>
+                <a:latin typeface="Calibri" pitchFamily="34" charset="0"/>
+                <a:ea typeface="Calibri" pitchFamily="34" charset="-122"/>
+                <a:cs typeface="Calibri" pitchFamily="34" charset="-120"/>
+              </a:rPr>
+              <a:t>If the Job Queue has multiple items, ALL of them run before the Event Loop touches the Callback Queue again.</a:t>
+            </a:r>
+            <a:endParaRPr lang="en-US" sz="1400" dirty="0"/>
+          </a:p>
+        </p:txBody>
+      </p:sp>
+    </p:spTree>
+  </p:cSld>
+  <p:clrMapOvr>
+    <a:masterClrMapping/>
+  </p:clrMapOvr>
+</p:sld>
+</file>
+
+<file path=ppt/slides/slide11.xml><?xml version="1.0" encoding="utf-8"?>
+<p:sld xmlns:a="http://schemas.openxmlformats.org/drawingml/2006/main" xmlns:r="http://schemas.openxmlformats.org/officeDocument/2006/relationships" xmlns:p="http://schemas.openxmlformats.org/presentationml/2006/main">
+  <p:cSld name="Slide 10">
+    <p:bg>
+      <p:bgPr>
+        <a:solidFill>
+          <a:srgbClr val="F7F7F5"/>
+        </a:solidFill>
+        <a:effectLst/>
+      </p:bgPr>
+    </p:bg>
+    <p:spTree>
+      <p:nvGrpSpPr>
+        <p:cNvPr id="1" name=""/>
+        <p:cNvGrpSpPr/>
+        <p:nvPr/>
+      </p:nvGrpSpPr>
+      <p:grpSpPr>
+        <a:xfrm>
+          <a:off x="0" y="0"/>
+          <a:ext cx="0" cy="0"/>
+          <a:chOff x="0" y="0"/>
+          <a:chExt cx="0" cy="0"/>
+        </a:xfrm>
+      </p:grpSpPr>
+      <p:sp>
+        <p:nvSpPr>
+          <p:cNvPr id="2" name="Text 0"/>
+          <p:cNvSpPr/>
+          <p:nvPr/>
+        </p:nvSpPr>
+        <p:spPr>
+          <a:xfrm>
+            <a:off x="548640" y="365760"/>
+            <a:ext cx="7315200" cy="365760"/>
+          </a:xfrm>
+          <a:prstGeom prst="rect">
+            <a:avLst/>
+          </a:prstGeom>
+          <a:noFill/>
+          <a:ln/>
+        </p:spPr>
+        <p:txBody>
+          <a:bodyPr wrap="square" rtlCol="0" anchor="ctr"/>
+          <a:lstStyle/>
+          <a:p>
+            <a:pPr marL="0" indent="0">
+              <a:buNone/>
+            </a:pPr>
+            <a:r>
+              <a:rPr lang="en-US" sz="1200" b="1" kern="0" spc="200" dirty="0">
+                <a:solidFill>
+                  <a:srgbClr val="2EC4B6"/>
+                </a:solidFill>
+                <a:latin typeface="Calibri" pitchFamily="34" charset="0"/>
+                <a:ea typeface="Calibri" pitchFamily="34" charset="-122"/>
+                <a:cs typeface="Calibri" pitchFamily="34" charset="-120"/>
+              </a:rPr>
+              <a:t>WORKED EXAMPLE 2</a:t>
+            </a:r>
+            <a:endParaRPr lang="en-US" sz="1200" dirty="0"/>
+          </a:p>
+        </p:txBody>
+      </p:sp>
+      <p:sp>
+        <p:nvSpPr>
+          <p:cNvPr id="3" name="Text 1"/>
+          <p:cNvSpPr/>
+          <p:nvPr/>
+        </p:nvSpPr>
+        <p:spPr>
+          <a:xfrm>
+            <a:off x="548640" y="685800"/>
+            <a:ext cx="10515600" cy="822960"/>
+          </a:xfrm>
+          <a:prstGeom prst="rect">
+            <a:avLst/>
+          </a:prstGeom>
+          <a:noFill/>
+          <a:ln/>
+        </p:spPr>
+        <p:txBody>
+          <a:bodyPr wrap="square" rtlCol="0" anchor="ctr"/>
+          <a:lstStyle/>
+          <a:p>
+            <a:pPr marL="0" indent="0">
+              <a:buNone/>
+            </a:pPr>
+            <a:r>
+              <a:rPr lang="en-US" sz="3000" b="1" dirty="0">
+                <a:solidFill>
+                  <a:srgbClr val="1B1F3B"/>
+                </a:solidFill>
+                <a:latin typeface="Bookman Old Style" pitchFamily="34" charset="0"/>
+                <a:ea typeface="Bookman Old Style" pitchFamily="34" charset="-122"/>
+                <a:cs typeface="Bookman Old Style" pitchFamily="34" charset="-120"/>
+              </a:rPr>
+              <a:t>Timers + Promises Together</a:t>
+            </a:r>
+            <a:endParaRPr lang="en-US" sz="3000" dirty="0"/>
+          </a:p>
+        </p:txBody>
+      </p:sp>
+      <p:sp>
+        <p:nvSpPr>
+          <p:cNvPr id="4" name="Shape 2"/>
+          <p:cNvSpPr/>
+          <p:nvPr/>
+        </p:nvSpPr>
+        <p:spPr>
+          <a:xfrm>
+            <a:off x="548640" y="1691640"/>
+            <a:ext cx="5120640" cy="4297680"/>
+          </a:xfrm>
+          <a:prstGeom prst="roundRect">
+            <a:avLst>
+              <a:gd name="adj" fmla="val 2128"/>
+            </a:avLst>
+          </a:prstGeom>
+          <a:solidFill>
+            <a:srgbClr val="1B1F3B"/>
+          </a:solidFill>
+          <a:ln/>
+        </p:spPr>
+      </p:sp>
+      <p:sp>
+        <p:nvSpPr>
+          <p:cNvPr id="5" name="Text 3"/>
+          <p:cNvSpPr/>
+          <p:nvPr/>
+        </p:nvSpPr>
+        <p:spPr>
+          <a:xfrm>
+            <a:off x="777240" y="1874520"/>
+            <a:ext cx="4663440" cy="3931920"/>
+          </a:xfrm>
+          <a:prstGeom prst="rect">
+            <a:avLst/>
+          </a:prstGeom>
+          <a:noFill/>
+          <a:ln/>
+        </p:spPr>
+        <p:txBody>
+          <a:bodyPr wrap="square" rtlCol="0" anchor="t"/>
+          <a:lstStyle/>
+          <a:p>
+            <a:pPr marL="0" indent="0">
+              <a:buNone/>
+            </a:pPr>
+            <a:r>
+              <a:rPr lang="en-US" sz="1250" dirty="0">
+                <a:solidFill>
+                  <a:srgbClr val="E9F5F4"/>
+                </a:solidFill>
+                <a:latin typeface="Courier New" pitchFamily="34" charset="0"/>
+                <a:ea typeface="Courier New" pitchFamily="34" charset="-122"/>
+                <a:cs typeface="Courier New" pitchFamily="34" charset="-120"/>
+              </a:rPr>
+              <a:t>function f1() { console.log("f1"); }</a:t>
+            </a:r>
+            <a:endParaRPr lang="en-US" sz="1250" dirty="0"/>
+          </a:p>
+          <a:p>
+            <a:pPr marL="0" indent="0">
+              <a:buNone/>
+            </a:pPr>
+            <a:r>
+              <a:rPr lang="en-US" sz="1250" dirty="0">
+                <a:solidFill>
+                  <a:srgbClr val="E9F5F4"/>
+                </a:solidFill>
+                <a:latin typeface="Courier New" pitchFamily="34" charset="0"/>
+                <a:ea typeface="Courier New" pitchFamily="34" charset="-122"/>
+                <a:cs typeface="Courier New" pitchFamily="34" charset="-120"/>
+              </a:rPr>
+              <a:t>function f2() { console.log("f2"); }</a:t>
+            </a:r>
+            <a:endParaRPr lang="en-US" sz="1250" dirty="0"/>
+          </a:p>
+          <a:p>
+            <a:pPr marL="0" indent="0">
+              <a:buNone/>
+            </a:pPr>
+            <a:endParaRPr lang="en-US" sz="1250" dirty="0"/>
+          </a:p>
+          <a:p>
+            <a:pPr marL="0" indent="0">
+              <a:buNone/>
+            </a:pPr>
+            <a:r>
+              <a:rPr lang="en-US" sz="1250" dirty="0">
+                <a:solidFill>
+                  <a:srgbClr val="E9F5F4"/>
+                </a:solidFill>
+                <a:latin typeface="Courier New" pitchFamily="34" charset="0"/>
+                <a:ea typeface="Courier New" pitchFamily="34" charset="-122"/>
+                <a:cs typeface="Courier New" pitchFamily="34" charset="-120"/>
+              </a:rPr>
+              <a:t>function main() {</a:t>
+            </a:r>
+            <a:endParaRPr lang="en-US" sz="1250" dirty="0"/>
+          </a:p>
+          <a:p>
+            <a:pPr marL="0" indent="0">
+              <a:buNone/>
+            </a:pPr>
+            <a:r>
+              <a:rPr lang="en-US" sz="1250" dirty="0">
+                <a:solidFill>
+                  <a:srgbClr val="E9F5F4"/>
+                </a:solidFill>
+                <a:latin typeface="Courier New" pitchFamily="34" charset="0"/>
+                <a:ea typeface="Courier New" pitchFamily="34" charset="-122"/>
+                <a:cs typeface="Courier New" pitchFamily="34" charset="-120"/>
+              </a:rPr>
+              <a:t>  console.log("main");</a:t>
+            </a:r>
+            <a:endParaRPr lang="en-US" sz="1250" dirty="0"/>
+          </a:p>
+          <a:p>
+            <a:pPr marL="0" indent="0">
+              <a:buNone/>
+            </a:pPr>
+            <a:r>
+              <a:rPr lang="en-US" sz="1250" dirty="0">
+                <a:solidFill>
+                  <a:srgbClr val="E9F5F4"/>
+                </a:solidFill>
+                <a:latin typeface="Courier New" pitchFamily="34" charset="0"/>
+                <a:ea typeface="Courier New" pitchFamily="34" charset="-122"/>
+                <a:cs typeface="Courier New" pitchFamily="34" charset="-120"/>
+              </a:rPr>
+              <a:t>  setTimeout(f1, 0);</a:t>
+            </a:r>
+            <a:endParaRPr lang="en-US" sz="1250" dirty="0"/>
+          </a:p>
+          <a:p>
+            <a:pPr marL="0" indent="0">
+              <a:buNone/>
+            </a:pPr>
+            <a:r>
+              <a:rPr lang="en-US" sz="1250" dirty="0">
+                <a:solidFill>
+                  <a:srgbClr val="E9F5F4"/>
+                </a:solidFill>
+                <a:latin typeface="Courier New" pitchFamily="34" charset="0"/>
+                <a:ea typeface="Courier New" pitchFamily="34" charset="-122"/>
+                <a:cs typeface="Courier New" pitchFamily="34" charset="-120"/>
+              </a:rPr>
+              <a:t>  Promise.resolve("I am a promise")</a:t>
+            </a:r>
+            <a:endParaRPr lang="en-US" sz="1250" dirty="0"/>
+          </a:p>
+          <a:p>
+            <a:pPr marL="0" indent="0">
+              <a:buNone/>
+            </a:pPr>
+            <a:r>
+              <a:rPr lang="en-US" sz="1250" dirty="0">
+                <a:solidFill>
+                  <a:srgbClr val="E9F5F4"/>
+                </a:solidFill>
+                <a:latin typeface="Courier New" pitchFamily="34" charset="0"/>
+                <a:ea typeface="Courier New" pitchFamily="34" charset="-122"/>
+                <a:cs typeface="Courier New" pitchFamily="34" charset="-120"/>
+              </a:rPr>
+              <a:t>    .then(msg =&gt; console.log(msg));</a:t>
+            </a:r>
+            <a:endParaRPr lang="en-US" sz="1250" dirty="0"/>
+          </a:p>
+          <a:p>
+            <a:pPr marL="0" indent="0">
+              <a:buNone/>
+            </a:pPr>
+            <a:r>
+              <a:rPr lang="en-US" sz="1250" dirty="0">
+                <a:solidFill>
+                  <a:srgbClr val="E9F5F4"/>
+                </a:solidFill>
+                <a:latin typeface="Courier New" pitchFamily="34" charset="0"/>
+                <a:ea typeface="Courier New" pitchFamily="34" charset="-122"/>
+                <a:cs typeface="Courier New" pitchFamily="34" charset="-120"/>
+              </a:rPr>
+              <a:t>  f2();</a:t>
+            </a:r>
+            <a:endParaRPr lang="en-US" sz="1250" dirty="0"/>
+          </a:p>
+          <a:p>
+            <a:pPr marL="0" indent="0">
+              <a:buNone/>
+            </a:pPr>
+            <a:r>
+              <a:rPr lang="en-US" sz="1250" dirty="0">
+                <a:solidFill>
+                  <a:srgbClr val="E9F5F4"/>
+                </a:solidFill>
+                <a:latin typeface="Courier New" pitchFamily="34" charset="0"/>
+                <a:ea typeface="Courier New" pitchFamily="34" charset="-122"/>
+                <a:cs typeface="Courier New" pitchFamily="34" charset="-120"/>
+              </a:rPr>
+              <a:t>}</a:t>
+            </a:r>
+            <a:endParaRPr lang="en-US" sz="1250" dirty="0"/>
+          </a:p>
+          <a:p>
+            <a:pPr marL="0" indent="0">
+              <a:buNone/>
+            </a:pPr>
+            <a:r>
+              <a:rPr lang="en-US" sz="1250" dirty="0">
+                <a:solidFill>
+                  <a:srgbClr val="E9F5F4"/>
+                </a:solidFill>
+                <a:latin typeface="Courier New" pitchFamily="34" charset="0"/>
+                <a:ea typeface="Courier New" pitchFamily="34" charset="-122"/>
+                <a:cs typeface="Courier New" pitchFamily="34" charset="-120"/>
+              </a:rPr>
+              <a:t>main();</a:t>
+            </a:r>
+            <a:endParaRPr lang="en-US" sz="1250" dirty="0"/>
+          </a:p>
+        </p:txBody>
+      </p:sp>
+      <p:sp>
+        <p:nvSpPr>
+          <p:cNvPr id="6" name="Shape 4"/>
+          <p:cNvSpPr/>
+          <p:nvPr/>
+        </p:nvSpPr>
+        <p:spPr>
+          <a:xfrm>
+            <a:off x="5989320" y="1856232"/>
+            <a:ext cx="292608" cy="292608"/>
+          </a:xfrm>
+          <a:prstGeom prst="ellipse">
+            <a:avLst/>
+          </a:prstGeom>
+          <a:solidFill>
+            <a:srgbClr val="2EC4B6"/>
+          </a:solidFill>
+          <a:ln/>
+        </p:spPr>
+      </p:sp>
+      <p:sp>
+        <p:nvSpPr>
+          <p:cNvPr id="7" name="Text 5"/>
+          <p:cNvSpPr/>
+          <p:nvPr/>
+        </p:nvSpPr>
+        <p:spPr>
+          <a:xfrm>
+            <a:off x="5989320" y="1856232"/>
+            <a:ext cx="292608" cy="292608"/>
+          </a:xfrm>
+          <a:prstGeom prst="rect">
+            <a:avLst/>
+          </a:prstGeom>
+          <a:noFill/>
+          <a:ln/>
+        </p:spPr>
+        <p:txBody>
+          <a:bodyPr wrap="square" rtlCol="0" anchor="ctr"/>
+          <a:lstStyle/>
+          <a:p>
+            <a:pPr marL="0" indent="0" algn="ctr">
+              <a:buNone/>
+            </a:pPr>
+            <a:r>
+              <a:rPr lang="en-US" sz="1200" b="1" dirty="0">
+                <a:solidFill>
+                  <a:srgbClr val="1B1F3B"/>
+                </a:solidFill>
+                <a:latin typeface="Calibri" pitchFamily="34" charset="0"/>
+                <a:ea typeface="Calibri" pitchFamily="34" charset="-122"/>
+                <a:cs typeface="Calibri" pitchFamily="34" charset="-120"/>
+              </a:rPr>
+              <a:t>1</a:t>
+            </a:r>
+            <a:endParaRPr lang="en-US" sz="1200" dirty="0"/>
+          </a:p>
+        </p:txBody>
+      </p:sp>
+      <p:sp>
+        <p:nvSpPr>
+          <p:cNvPr id="8" name="Text 6"/>
+          <p:cNvSpPr/>
+          <p:nvPr/>
+        </p:nvSpPr>
+        <p:spPr>
+          <a:xfrm>
+            <a:off x="6446520" y="1773936"/>
+            <a:ext cx="5120640" cy="548640"/>
+          </a:xfrm>
+          <a:prstGeom prst="rect">
+            <a:avLst/>
+          </a:prstGeom>
+          <a:noFill/>
+          <a:ln/>
+        </p:spPr>
+        <p:txBody>
+          <a:bodyPr wrap="square" rtlCol="0" anchor="t"/>
+          <a:lstStyle/>
+          <a:p>
+            <a:pPr marL="0" indent="0">
+              <a:buNone/>
+            </a:pPr>
+            <a:r>
+              <a:rPr lang="en-US" sz="1250" dirty="0">
+                <a:solidFill>
+                  <a:srgbClr val="1B1F3B"/>
+                </a:solidFill>
+                <a:latin typeface="Calibri" pitchFamily="34" charset="0"/>
+                <a:ea typeface="Calibri" pitchFamily="34" charset="-122"/>
+                <a:cs typeface="Calibri" pitchFamily="34" charset="-120"/>
+              </a:rPr>
+              <a:t>main() logs "main" (sync)</a:t>
+            </a:r>
+            <a:endParaRPr lang="en-US" sz="1250" dirty="0"/>
+          </a:p>
+        </p:txBody>
+      </p:sp>
+      <p:sp>
+        <p:nvSpPr>
+          <p:cNvPr id="9" name="Shape 7"/>
+          <p:cNvSpPr/>
+          <p:nvPr/>
+        </p:nvSpPr>
+        <p:spPr>
+          <a:xfrm>
+            <a:off x="5989320" y="2459736"/>
+            <a:ext cx="292608" cy="292608"/>
+          </a:xfrm>
+          <a:prstGeom prst="ellipse">
+            <a:avLst/>
+          </a:prstGeom>
+          <a:solidFill>
+            <a:srgbClr val="2EC4B6"/>
+          </a:solidFill>
+          <a:ln/>
+        </p:spPr>
+      </p:sp>
+      <p:sp>
+        <p:nvSpPr>
+          <p:cNvPr id="10" name="Text 8"/>
+          <p:cNvSpPr/>
+          <p:nvPr/>
+        </p:nvSpPr>
+        <p:spPr>
+          <a:xfrm>
+            <a:off x="5989320" y="2459736"/>
+            <a:ext cx="292608" cy="292608"/>
+          </a:xfrm>
+          <a:prstGeom prst="rect">
+            <a:avLst/>
+          </a:prstGeom>
+          <a:noFill/>
+          <a:ln/>
+        </p:spPr>
+        <p:txBody>
+          <a:bodyPr wrap="square" rtlCol="0" anchor="ctr"/>
+          <a:lstStyle/>
+          <a:p>
+            <a:pPr marL="0" indent="0" algn="ctr">
+              <a:buNone/>
+            </a:pPr>
+            <a:r>
+              <a:rPr lang="en-US" sz="1200" b="1" dirty="0">
+                <a:solidFill>
+                  <a:srgbClr val="1B1F3B"/>
+                </a:solidFill>
+                <a:latin typeface="Calibri" pitchFamily="34" charset="0"/>
+                <a:ea typeface="Calibri" pitchFamily="34" charset="-122"/>
+                <a:cs typeface="Calibri" pitchFamily="34" charset="-120"/>
+              </a:rPr>
+              <a:t>2</a:t>
+            </a:r>
+            <a:endParaRPr lang="en-US" sz="1200" dirty="0"/>
+          </a:p>
+        </p:txBody>
+      </p:sp>
+      <p:sp>
+        <p:nvSpPr>
+          <p:cNvPr id="11" name="Text 9"/>
+          <p:cNvSpPr/>
+          <p:nvPr/>
+        </p:nvSpPr>
+        <p:spPr>
+          <a:xfrm>
+            <a:off x="6446520" y="2377440"/>
+            <a:ext cx="5120640" cy="548640"/>
+          </a:xfrm>
+          <a:prstGeom prst="rect">
+            <a:avLst/>
+          </a:prstGeom>
+          <a:noFill/>
+          <a:ln/>
+        </p:spPr>
+        <p:txBody>
+          <a:bodyPr wrap="square" rtlCol="0" anchor="t"/>
+          <a:lstStyle/>
+          <a:p>
+            <a:pPr marL="0" indent="0">
+              <a:buNone/>
+            </a:pPr>
+            <a:r>
+              <a:rPr lang="en-US" sz="1250" dirty="0">
+                <a:solidFill>
+                  <a:srgbClr val="1B1F3B"/>
+                </a:solidFill>
+                <a:latin typeface="Calibri" pitchFamily="34" charset="0"/>
+                <a:ea typeface="Calibri" pitchFamily="34" charset="-122"/>
+                <a:cs typeface="Calibri" pitchFamily="34" charset="-120"/>
+              </a:rPr>
+              <a:t>setTimeout(f1, 0) → f1 → Callback Queue</a:t>
+            </a:r>
+            <a:endParaRPr lang="en-US" sz="1250" dirty="0"/>
+          </a:p>
+        </p:txBody>
+      </p:sp>
+      <p:sp>
+        <p:nvSpPr>
+          <p:cNvPr id="12" name="Shape 10"/>
+          <p:cNvSpPr/>
+          <p:nvPr/>
+        </p:nvSpPr>
+        <p:spPr>
+          <a:xfrm>
+            <a:off x="5989320" y="3063240"/>
+            <a:ext cx="292608" cy="292608"/>
+          </a:xfrm>
+          <a:prstGeom prst="ellipse">
+            <a:avLst/>
+          </a:prstGeom>
+          <a:solidFill>
+            <a:srgbClr val="2EC4B6"/>
+          </a:solidFill>
+          <a:ln/>
+        </p:spPr>
+      </p:sp>
+      <p:sp>
+        <p:nvSpPr>
+          <p:cNvPr id="13" name="Text 11"/>
+          <p:cNvSpPr/>
+          <p:nvPr/>
+        </p:nvSpPr>
+        <p:spPr>
+          <a:xfrm>
+            <a:off x="5989320" y="3063240"/>
+            <a:ext cx="292608" cy="292608"/>
+          </a:xfrm>
+          <a:prstGeom prst="rect">
+            <a:avLst/>
+          </a:prstGeom>
+          <a:noFill/>
+          <a:ln/>
+        </p:spPr>
+        <p:txBody>
+          <a:bodyPr wrap="square" rtlCol="0" anchor="ctr"/>
+          <a:lstStyle/>
+          <a:p>
+            <a:pPr marL="0" indent="0" algn="ctr">
+              <a:buNone/>
+            </a:pPr>
+            <a:r>
+              <a:rPr lang="en-US" sz="1200" b="1" dirty="0">
+                <a:solidFill>
+                  <a:srgbClr val="1B1F3B"/>
+                </a:solidFill>
+                <a:latin typeface="Calibri" pitchFamily="34" charset="0"/>
+                <a:ea typeface="Calibri" pitchFamily="34" charset="-122"/>
+                <a:cs typeface="Calibri" pitchFamily="34" charset="-120"/>
+              </a:rPr>
+              <a:t>3</a:t>
+            </a:r>
+            <a:endParaRPr lang="en-US" sz="1200" dirty="0"/>
+          </a:p>
+        </p:txBody>
+      </p:sp>
+      <p:sp>
+        <p:nvSpPr>
+          <p:cNvPr id="14" name="Text 12"/>
+          <p:cNvSpPr/>
+          <p:nvPr/>
+        </p:nvSpPr>
+        <p:spPr>
+          <a:xfrm>
+            <a:off x="6446520" y="2980944"/>
+            <a:ext cx="5120640" cy="548640"/>
+          </a:xfrm>
+          <a:prstGeom prst="rect">
+            <a:avLst/>
+          </a:prstGeom>
+          <a:noFill/>
+          <a:ln/>
+        </p:spPr>
+        <p:txBody>
+          <a:bodyPr wrap="square" rtlCol="0" anchor="t"/>
+          <a:lstStyle/>
+          <a:p>
+            <a:pPr marL="0" indent="0">
+              <a:buNone/>
+            </a:pPr>
+            <a:r>
+              <a:rPr lang="en-US" sz="1250" dirty="0">
+                <a:solidFill>
+                  <a:srgbClr val="1B1F3B"/>
+                </a:solidFill>
+                <a:latin typeface="Calibri" pitchFamily="34" charset="0"/>
+                <a:ea typeface="Calibri" pitchFamily="34" charset="-122"/>
+                <a:cs typeface="Calibri" pitchFamily="34" charset="-120"/>
+              </a:rPr>
+              <a:t>Promise resolves → .then handler → Job Queue</a:t>
+            </a:r>
+            <a:endParaRPr lang="en-US" sz="1250" dirty="0"/>
+          </a:p>
+        </p:txBody>
+      </p:sp>
+      <p:sp>
+        <p:nvSpPr>
+          <p:cNvPr id="15" name="Shape 13"/>
+          <p:cNvSpPr/>
+          <p:nvPr/>
+        </p:nvSpPr>
+        <p:spPr>
+          <a:xfrm>
+            <a:off x="5989320" y="3666744"/>
+            <a:ext cx="292608" cy="292608"/>
+          </a:xfrm>
+          <a:prstGeom prst="ellipse">
+            <a:avLst/>
+          </a:prstGeom>
+          <a:solidFill>
+            <a:srgbClr val="2EC4B6"/>
+          </a:solidFill>
+          <a:ln/>
+        </p:spPr>
+      </p:sp>
+      <p:sp>
+        <p:nvSpPr>
+          <p:cNvPr id="16" name="Text 14"/>
+          <p:cNvSpPr/>
+          <p:nvPr/>
+        </p:nvSpPr>
+        <p:spPr>
+          <a:xfrm>
+            <a:off x="5989320" y="3666744"/>
+            <a:ext cx="292608" cy="292608"/>
+          </a:xfrm>
+          <a:prstGeom prst="rect">
+            <a:avLst/>
+          </a:prstGeom>
+          <a:noFill/>
+          <a:ln/>
+        </p:spPr>
+        <p:txBody>
+          <a:bodyPr wrap="square" rtlCol="0" anchor="ctr"/>
+          <a:lstStyle/>
+          <a:p>
+            <a:pPr marL="0" indent="0" algn="ctr">
+              <a:buNone/>
+            </a:pPr>
+            <a:r>
+              <a:rPr lang="en-US" sz="1200" b="1" dirty="0">
+                <a:solidFill>
+                  <a:srgbClr val="1B1F3B"/>
+                </a:solidFill>
+                <a:latin typeface="Calibri" pitchFamily="34" charset="0"/>
+                <a:ea typeface="Calibri" pitchFamily="34" charset="-122"/>
+                <a:cs typeface="Calibri" pitchFamily="34" charset="-120"/>
+              </a:rPr>
+              <a:t>4</a:t>
+            </a:r>
+            <a:endParaRPr lang="en-US" sz="1200" dirty="0"/>
+          </a:p>
+        </p:txBody>
+      </p:sp>
+      <p:sp>
+        <p:nvSpPr>
+          <p:cNvPr id="17" name="Text 15"/>
+          <p:cNvSpPr/>
+          <p:nvPr/>
+        </p:nvSpPr>
+        <p:spPr>
+          <a:xfrm>
+            <a:off x="6446520" y="3584448"/>
+            <a:ext cx="5120640" cy="548640"/>
+          </a:xfrm>
+          <a:prstGeom prst="rect">
+            <a:avLst/>
+          </a:prstGeom>
+          <a:noFill/>
+          <a:ln/>
+        </p:spPr>
+        <p:txBody>
+          <a:bodyPr wrap="square" rtlCol="0" anchor="t"/>
+          <a:lstStyle/>
+          <a:p>
+            <a:pPr marL="0" indent="0">
+              <a:buNone/>
+            </a:pPr>
+            <a:r>
+              <a:rPr lang="en-US" sz="1250" dirty="0">
+                <a:solidFill>
+                  <a:srgbClr val="1B1F3B"/>
+                </a:solidFill>
+                <a:latin typeface="Calibri" pitchFamily="34" charset="0"/>
+                <a:ea typeface="Calibri" pitchFamily="34" charset="-122"/>
+                <a:cs typeface="Calibri" pitchFamily="34" charset="-120"/>
+              </a:rPr>
+              <a:t>f2() runs (still sync) → logs "f2"</a:t>
+            </a:r>
+            <a:endParaRPr lang="en-US" sz="1250" dirty="0"/>
+          </a:p>
+        </p:txBody>
+      </p:sp>
+      <p:sp>
+        <p:nvSpPr>
+          <p:cNvPr id="18" name="Shape 16"/>
+          <p:cNvSpPr/>
+          <p:nvPr/>
+        </p:nvSpPr>
+        <p:spPr>
+          <a:xfrm>
+            <a:off x="5989320" y="4270248"/>
+            <a:ext cx="292608" cy="292608"/>
+          </a:xfrm>
+          <a:prstGeom prst="ellipse">
+            <a:avLst/>
+          </a:prstGeom>
+          <a:solidFill>
+            <a:srgbClr val="F0DB4F"/>
+          </a:solidFill>
+          <a:ln/>
+        </p:spPr>
+      </p:sp>
+      <p:sp>
+        <p:nvSpPr>
+          <p:cNvPr id="19" name="Text 17"/>
+          <p:cNvSpPr/>
+          <p:nvPr/>
+        </p:nvSpPr>
+        <p:spPr>
+          <a:xfrm>
+            <a:off x="5989320" y="4270248"/>
+            <a:ext cx="292608" cy="292608"/>
+          </a:xfrm>
+          <a:prstGeom prst="rect">
+            <a:avLst/>
+          </a:prstGeom>
+          <a:noFill/>
+          <a:ln/>
+        </p:spPr>
+        <p:txBody>
+          <a:bodyPr wrap="square" rtlCol="0" anchor="ctr"/>
+          <a:lstStyle/>
+          <a:p>
+            <a:pPr marL="0" indent="0" algn="ctr">
+              <a:buNone/>
+            </a:pPr>
+            <a:r>
+              <a:rPr lang="en-US" sz="1200" b="1" dirty="0">
+                <a:solidFill>
+                  <a:srgbClr val="1B1F3B"/>
+                </a:solidFill>
+                <a:latin typeface="Calibri" pitchFamily="34" charset="0"/>
+                <a:ea typeface="Calibri" pitchFamily="34" charset="-122"/>
+                <a:cs typeface="Calibri" pitchFamily="34" charset="-120"/>
+              </a:rPr>
+              <a:t>5</a:t>
+            </a:r>
+            <a:endParaRPr lang="en-US" sz="1200" dirty="0"/>
+          </a:p>
+        </p:txBody>
+      </p:sp>
+      <p:sp>
+        <p:nvSpPr>
+          <p:cNvPr id="20" name="Text 18"/>
+          <p:cNvSpPr/>
+          <p:nvPr/>
+        </p:nvSpPr>
+        <p:spPr>
+          <a:xfrm>
+            <a:off x="6446520" y="4187952"/>
+            <a:ext cx="5120640" cy="548640"/>
+          </a:xfrm>
+          <a:prstGeom prst="rect">
+            <a:avLst/>
+          </a:prstGeom>
+          <a:noFill/>
+          <a:ln/>
+        </p:spPr>
+        <p:txBody>
+          <a:bodyPr wrap="square" rtlCol="0" anchor="t"/>
+          <a:lstStyle/>
+          <a:p>
+            <a:pPr marL="0" indent="0">
+              <a:buNone/>
+            </a:pPr>
+            <a:r>
+              <a:rPr lang="en-US" sz="1250" dirty="0">
+                <a:solidFill>
+                  <a:srgbClr val="1B1F3B"/>
+                </a:solidFill>
+                <a:latin typeface="Calibri" pitchFamily="34" charset="0"/>
+                <a:ea typeface="Calibri" pitchFamily="34" charset="-122"/>
+                <a:cs typeface="Calibri" pitchFamily="34" charset="-120"/>
+              </a:rPr>
+              <a:t>Stack empty → Job Queue wins → logs "I am a promise"</a:t>
+            </a:r>
+            <a:endParaRPr lang="en-US" sz="1250" dirty="0"/>
+          </a:p>
+        </p:txBody>
+      </p:sp>
+      <p:sp>
+        <p:nvSpPr>
+          <p:cNvPr id="21" name="Shape 19"/>
+          <p:cNvSpPr/>
+          <p:nvPr/>
+        </p:nvSpPr>
+        <p:spPr>
+          <a:xfrm>
+            <a:off x="5989320" y="4873752"/>
+            <a:ext cx="292608" cy="292608"/>
+          </a:xfrm>
+          <a:prstGeom prst="ellipse">
+            <a:avLst/>
+          </a:prstGeom>
+          <a:solidFill>
+            <a:srgbClr val="F0DB4F"/>
+          </a:solidFill>
+          <a:ln/>
+        </p:spPr>
+      </p:sp>
+      <p:sp>
+        <p:nvSpPr>
+          <p:cNvPr id="22" name="Text 20"/>
+          <p:cNvSpPr/>
+          <p:nvPr/>
+        </p:nvSpPr>
+        <p:spPr>
+          <a:xfrm>
+            <a:off x="5989320" y="4873752"/>
+            <a:ext cx="292608" cy="292608"/>
+          </a:xfrm>
+          <a:prstGeom prst="rect">
+            <a:avLst/>
+          </a:prstGeom>
+          <a:noFill/>
+          <a:ln/>
+        </p:spPr>
+        <p:txBody>
+          <a:bodyPr wrap="square" rtlCol="0" anchor="ctr"/>
+          <a:lstStyle/>
+          <a:p>
+            <a:pPr marL="0" indent="0" algn="ctr">
+              <a:buNone/>
+            </a:pPr>
+            <a:r>
+              <a:rPr lang="en-US" sz="1200" b="1" dirty="0">
+                <a:solidFill>
+                  <a:srgbClr val="1B1F3B"/>
+                </a:solidFill>
+                <a:latin typeface="Calibri" pitchFamily="34" charset="0"/>
+                <a:ea typeface="Calibri" pitchFamily="34" charset="-122"/>
+                <a:cs typeface="Calibri" pitchFamily="34" charset="-120"/>
+              </a:rPr>
+              <a:t>6</a:t>
+            </a:r>
+            <a:endParaRPr lang="en-US" sz="1200" dirty="0"/>
+          </a:p>
+        </p:txBody>
+      </p:sp>
+      <p:sp>
+        <p:nvSpPr>
+          <p:cNvPr id="23" name="Text 21"/>
+          <p:cNvSpPr/>
+          <p:nvPr/>
+        </p:nvSpPr>
+        <p:spPr>
+          <a:xfrm>
+            <a:off x="6446520" y="4791456"/>
+            <a:ext cx="5120640" cy="548640"/>
+          </a:xfrm>
+          <a:prstGeom prst="rect">
+            <a:avLst/>
+          </a:prstGeom>
+          <a:noFill/>
+          <a:ln/>
+        </p:spPr>
+        <p:txBody>
+          <a:bodyPr wrap="square" rtlCol="0" anchor="t"/>
+          <a:lstStyle/>
+          <a:p>
+            <a:pPr marL="0" indent="0">
+              <a:buNone/>
+            </a:pPr>
+            <a:r>
+              <a:rPr lang="en-US" sz="1250" dirty="0">
+                <a:solidFill>
+                  <a:srgbClr val="1B1F3B"/>
+                </a:solidFill>
+                <a:latin typeface="Calibri" pitchFamily="34" charset="0"/>
+                <a:ea typeface="Calibri" pitchFamily="34" charset="-122"/>
+                <a:cs typeface="Calibri" pitchFamily="34" charset="-120"/>
+              </a:rPr>
+              <a:t>Job Queue empty → Callback Queue → logs "f1"</a:t>
+            </a:r>
+            <a:endParaRPr lang="en-US" sz="1250" dirty="0"/>
+          </a:p>
+        </p:txBody>
+      </p:sp>
+      <p:sp>
+        <p:nvSpPr>
+          <p:cNvPr id="24" name="Shape 22"/>
+          <p:cNvSpPr/>
+          <p:nvPr/>
+        </p:nvSpPr>
+        <p:spPr>
+          <a:xfrm>
+            <a:off x="5989320" y="5532120"/>
+            <a:ext cx="5577840" cy="457200"/>
+          </a:xfrm>
+          <a:prstGeom prst="roundRect">
+            <a:avLst>
+              <a:gd name="adj" fmla="val 16000"/>
+            </a:avLst>
+          </a:prstGeom>
+          <a:solidFill>
+            <a:srgbClr val="F0DB4F"/>
+          </a:solidFill>
+          <a:ln/>
+        </p:spPr>
+      </p:sp>
+      <p:sp>
+        <p:nvSpPr>
+          <p:cNvPr id="25" name="Text 23"/>
+          <p:cNvSpPr/>
+          <p:nvPr/>
+        </p:nvSpPr>
+        <p:spPr>
+          <a:xfrm>
+            <a:off x="5989320" y="5532120"/>
+            <a:ext cx="5577840" cy="457200"/>
+          </a:xfrm>
+          <a:prstGeom prst="rect">
+            <a:avLst/>
+          </a:prstGeom>
+          <a:noFill/>
+          <a:ln/>
+        </p:spPr>
+        <p:txBody>
+          <a:bodyPr wrap="square" rtlCol="0" anchor="ctr"/>
+          <a:lstStyle/>
+          <a:p>
+            <a:pPr marL="0" indent="0" algn="ctr">
+              <a:buNone/>
+            </a:pPr>
+            <a:r>
+              <a:rPr lang="en-US" sz="1250" b="1" dirty="0">
+                <a:solidFill>
+                  <a:srgbClr val="1B1F3B"/>
+                </a:solidFill>
+                <a:latin typeface="Calibri" pitchFamily="34" charset="0"/>
+                <a:ea typeface="Calibri" pitchFamily="34" charset="-122"/>
+                <a:cs typeface="Calibri" pitchFamily="34" charset="-120"/>
+              </a:rPr>
+              <a:t>Output:  main → f2 → "I am a promise" → f1</a:t>
+            </a:r>
+            <a:endParaRPr lang="en-US" sz="1250" dirty="0"/>
+          </a:p>
+        </p:txBody>
+      </p:sp>
+    </p:spTree>
+  </p:cSld>
+  <p:clrMapOvr>
+    <a:masterClrMapping/>
+  </p:clrMapOvr>
+</p:sld>
+</file>
+
+<file path=ppt/slides/slide12.xml><?xml version="1.0" encoding="utf-8"?>
+<p:sld xmlns:a="http://schemas.openxmlformats.org/drawingml/2006/main" xmlns:r="http://schemas.openxmlformats.org/officeDocument/2006/relationships" xmlns:p="http://schemas.openxmlformats.org/presentationml/2006/main">
   <p:cSld name="Slide 11">
     <p:bg>
       <p:bgPr>
@@ -2251,7 +3944,7 @@
 </p:sld>
 </file>
 
-<file path=ppt/slides/slide11.xml><?xml version="1.0" encoding="utf-8"?>
+<file path=ppt/slides/slide13.xml><?xml version="1.0" encoding="utf-8"?>
 <p:sld xmlns:a="http://schemas.openxmlformats.org/drawingml/2006/main" xmlns:r="http://schemas.openxmlformats.org/officeDocument/2006/relationships" xmlns:p="http://schemas.openxmlformats.org/presentationml/2006/main">
   <p:cSld name="Slide 12">
     <p:bg>
@@ -2852,7 +4545,7 @@
 </p:sld>
 </file>
 
-<file path=ppt/slides/slide12.xml><?xml version="1.0" encoding="utf-8"?>
+<file path=ppt/slides/slide14.xml><?xml version="1.0" encoding="utf-8"?>
 <p:sld xmlns:a="http://schemas.openxmlformats.org/drawingml/2006/main" xmlns:r="http://schemas.openxmlformats.org/officeDocument/2006/relationships" xmlns:p="http://schemas.openxmlformats.org/presentationml/2006/main">
   <p:cSld name="Slide 13">
     <p:bg>
@@ -8978,6 +10671,1333 @@
 
 <file path=ppt/slides/slide7.xml><?xml version="1.0" encoding="utf-8"?>
 <p:sld xmlns:a="http://schemas.openxmlformats.org/drawingml/2006/main" xmlns:r="http://schemas.openxmlformats.org/officeDocument/2006/relationships" xmlns:p="http://schemas.openxmlformats.org/presentationml/2006/main">
+  <p:cSld>
+    <p:bg>
+      <p:bgPr>
+        <a:solidFill>
+          <a:schemeClr val="tx1">
+            <a:lumMod val="95000"/>
+            <a:lumOff val="5000"/>
+          </a:schemeClr>
+        </a:solidFill>
+        <a:effectLst/>
+      </p:bgPr>
+    </p:bg>
+    <p:spTree>
+      <p:nvGrpSpPr>
+        <p:cNvPr id="1" name=""/>
+        <p:cNvGrpSpPr/>
+        <p:nvPr/>
+      </p:nvGrpSpPr>
+      <p:grpSpPr>
+        <a:xfrm>
+          <a:off x="0" y="0"/>
+          <a:ext cx="0" cy="0"/>
+          <a:chOff x="0" y="0"/>
+          <a:chExt cx="0" cy="0"/>
+        </a:xfrm>
+      </p:grpSpPr>
+      <p:grpSp>
+        <p:nvGrpSpPr>
+          <p:cNvPr id="2" name="Group 1">
+            <a:extLst>
+              <a:ext uri="{FF2B5EF4-FFF2-40B4-BE49-F238E27FC236}">
+                <a16:creationId xmlns:a16="http://schemas.microsoft.com/office/drawing/2014/main" id="{BCEA07BF-F688-2F3A-C346-EEF894666BC2}"/>
+              </a:ext>
+            </a:extLst>
+          </p:cNvPr>
+          <p:cNvGrpSpPr/>
+          <p:nvPr/>
+        </p:nvGrpSpPr>
+        <p:grpSpPr>
+          <a:xfrm>
+            <a:off x="4625005" y="661795"/>
+            <a:ext cx="1300751" cy="2446351"/>
+            <a:chOff x="4093698" y="1590261"/>
+            <a:chExt cx="1300751" cy="2446351"/>
+          </a:xfrm>
+        </p:grpSpPr>
+        <p:sp>
+          <p:nvSpPr>
+            <p:cNvPr id="3" name="Rectangle 2">
+              <a:extLst>
+                <a:ext uri="{FF2B5EF4-FFF2-40B4-BE49-F238E27FC236}">
+                  <a16:creationId xmlns:a16="http://schemas.microsoft.com/office/drawing/2014/main" id="{431990FE-56C5-D9A4-1153-2E43D7B7DD35}"/>
+                </a:ext>
+              </a:extLst>
+            </p:cNvPr>
+            <p:cNvSpPr/>
+            <p:nvPr/>
+          </p:nvSpPr>
+          <p:spPr>
+            <a:xfrm>
+              <a:off x="4093698" y="1590261"/>
+              <a:ext cx="1300751" cy="728869"/>
+            </a:xfrm>
+            <a:prstGeom prst="rect">
+              <a:avLst/>
+            </a:prstGeom>
+          </p:spPr>
+          <p:style>
+            <a:lnRef idx="2">
+              <a:schemeClr val="accent1">
+                <a:shade val="15000"/>
+              </a:schemeClr>
+            </a:lnRef>
+            <a:fillRef idx="1">
+              <a:schemeClr val="accent1"/>
+            </a:fillRef>
+            <a:effectRef idx="0">
+              <a:schemeClr val="accent1"/>
+            </a:effectRef>
+            <a:fontRef idx="minor">
+              <a:schemeClr val="lt1"/>
+            </a:fontRef>
+          </p:style>
+          <p:txBody>
+            <a:bodyPr rtlCol="0" anchor="ctr"/>
+            <a:lstStyle/>
+            <a:p>
+              <a:pPr algn="ctr"/>
+              <a:endParaRPr lang="en-US"/>
+            </a:p>
+          </p:txBody>
+        </p:sp>
+        <p:sp>
+          <p:nvSpPr>
+            <p:cNvPr id="4" name="Rectangle 3">
+              <a:extLst>
+                <a:ext uri="{FF2B5EF4-FFF2-40B4-BE49-F238E27FC236}">
+                  <a16:creationId xmlns:a16="http://schemas.microsoft.com/office/drawing/2014/main" id="{201AA9BE-9864-4F68-9D5B-022640247FF0}"/>
+                </a:ext>
+              </a:extLst>
+            </p:cNvPr>
+            <p:cNvSpPr/>
+            <p:nvPr/>
+          </p:nvSpPr>
+          <p:spPr>
+            <a:xfrm>
+              <a:off x="4093698" y="2449002"/>
+              <a:ext cx="1300751" cy="728869"/>
+            </a:xfrm>
+            <a:prstGeom prst="rect">
+              <a:avLst/>
+            </a:prstGeom>
+          </p:spPr>
+          <p:style>
+            <a:lnRef idx="2">
+              <a:schemeClr val="accent1">
+                <a:shade val="15000"/>
+              </a:schemeClr>
+            </a:lnRef>
+            <a:fillRef idx="1">
+              <a:schemeClr val="accent1"/>
+            </a:fillRef>
+            <a:effectRef idx="0">
+              <a:schemeClr val="accent1"/>
+            </a:effectRef>
+            <a:fontRef idx="minor">
+              <a:schemeClr val="lt1"/>
+            </a:fontRef>
+          </p:style>
+          <p:txBody>
+            <a:bodyPr rtlCol="0" anchor="ctr"/>
+            <a:lstStyle/>
+            <a:p>
+              <a:pPr algn="ctr"/>
+              <a:endParaRPr lang="en-US" b="1" dirty="0">
+                <a:latin typeface="Consolas" panose="020B0609020204030204" pitchFamily="49" charset="0"/>
+              </a:endParaRPr>
+            </a:p>
+          </p:txBody>
+        </p:sp>
+        <p:sp>
+          <p:nvSpPr>
+            <p:cNvPr id="5" name="Rectangle 4">
+              <a:extLst>
+                <a:ext uri="{FF2B5EF4-FFF2-40B4-BE49-F238E27FC236}">
+                  <a16:creationId xmlns:a16="http://schemas.microsoft.com/office/drawing/2014/main" id="{33D8AA38-3902-9174-4572-4D7BBE26919B}"/>
+                </a:ext>
+              </a:extLst>
+            </p:cNvPr>
+            <p:cNvSpPr/>
+            <p:nvPr/>
+          </p:nvSpPr>
+          <p:spPr>
+            <a:xfrm>
+              <a:off x="4093698" y="3307743"/>
+              <a:ext cx="1300751" cy="728869"/>
+            </a:xfrm>
+            <a:prstGeom prst="rect">
+              <a:avLst/>
+            </a:prstGeom>
+          </p:spPr>
+          <p:style>
+            <a:lnRef idx="2">
+              <a:schemeClr val="accent1">
+                <a:shade val="15000"/>
+              </a:schemeClr>
+            </a:lnRef>
+            <a:fillRef idx="1">
+              <a:schemeClr val="accent1"/>
+            </a:fillRef>
+            <a:effectRef idx="0">
+              <a:schemeClr val="accent1"/>
+            </a:effectRef>
+            <a:fontRef idx="minor">
+              <a:schemeClr val="lt1"/>
+            </a:fontRef>
+          </p:style>
+          <p:txBody>
+            <a:bodyPr rtlCol="0" anchor="ctr"/>
+            <a:lstStyle/>
+            <a:p>
+              <a:pPr algn="ctr"/>
+              <a:endParaRPr lang="en-US" b="1" dirty="0">
+                <a:latin typeface="Consolas" panose="020B0609020204030204" pitchFamily="49" charset="0"/>
+              </a:endParaRPr>
+            </a:p>
+          </p:txBody>
+        </p:sp>
+      </p:grpSp>
+      <p:sp>
+        <p:nvSpPr>
+          <p:cNvPr id="8" name="Rectangle: Rounded Corners 7">
+            <a:extLst>
+              <a:ext uri="{FF2B5EF4-FFF2-40B4-BE49-F238E27FC236}">
+                <a16:creationId xmlns:a16="http://schemas.microsoft.com/office/drawing/2014/main" id="{9B0F5E90-483D-79B6-9CCB-36921BB3CA0B}"/>
+              </a:ext>
+            </a:extLst>
+          </p:cNvPr>
+          <p:cNvSpPr/>
+          <p:nvPr/>
+        </p:nvSpPr>
+        <p:spPr>
+          <a:xfrm>
+            <a:off x="8187394" y="484216"/>
+            <a:ext cx="3635784" cy="2623930"/>
+          </a:xfrm>
+          <a:prstGeom prst="roundRect">
+            <a:avLst/>
+          </a:prstGeom>
+        </p:spPr>
+        <p:style>
+          <a:lnRef idx="1">
+            <a:schemeClr val="accent5"/>
+          </a:lnRef>
+          <a:fillRef idx="2">
+            <a:schemeClr val="accent5"/>
+          </a:fillRef>
+          <a:effectRef idx="1">
+            <a:schemeClr val="accent5"/>
+          </a:effectRef>
+          <a:fontRef idx="minor">
+            <a:schemeClr val="dk1"/>
+          </a:fontRef>
+        </p:style>
+        <p:txBody>
+          <a:bodyPr rtlCol="0" anchor="ctr"/>
+          <a:lstStyle/>
+          <a:p>
+            <a:pPr algn="ctr"/>
+            <a:endParaRPr lang="en-US" dirty="0"/>
+          </a:p>
+        </p:txBody>
+      </p:sp>
+      <p:pic>
+        <p:nvPicPr>
+          <p:cNvPr id="9" name="Picture 8">
+            <a:extLst>
+              <a:ext uri="{FF2B5EF4-FFF2-40B4-BE49-F238E27FC236}">
+                <a16:creationId xmlns:a16="http://schemas.microsoft.com/office/drawing/2014/main" id="{7EE8711A-5790-6F8E-A940-99C5D7DBD039}"/>
+              </a:ext>
+            </a:extLst>
+          </p:cNvPr>
+          <p:cNvPicPr>
+            <a:picLocks noChangeAspect="1"/>
+          </p:cNvPicPr>
+          <p:nvPr/>
+        </p:nvPicPr>
+        <p:blipFill>
+          <a:blip r:embed="rId2"/>
+          <a:stretch>
+            <a:fillRect/>
+          </a:stretch>
+        </p:blipFill>
+        <p:spPr>
+          <a:xfrm>
+            <a:off x="6575562" y="2108021"/>
+            <a:ext cx="962025" cy="1000125"/>
+          </a:xfrm>
+          <a:prstGeom prst="rect">
+            <a:avLst/>
+          </a:prstGeom>
+        </p:spPr>
+      </p:pic>
+      <p:sp>
+        <p:nvSpPr>
+          <p:cNvPr id="10" name="Rectangle 9">
+            <a:extLst>
+              <a:ext uri="{FF2B5EF4-FFF2-40B4-BE49-F238E27FC236}">
+                <a16:creationId xmlns:a16="http://schemas.microsoft.com/office/drawing/2014/main" id="{0E889ED5-52E8-AE8E-D971-D6639C58AAB8}"/>
+              </a:ext>
+            </a:extLst>
+          </p:cNvPr>
+          <p:cNvSpPr/>
+          <p:nvPr/>
+        </p:nvSpPr>
+        <p:spPr>
+          <a:xfrm>
+            <a:off x="4857225" y="3610405"/>
+            <a:ext cx="6660338" cy="707205"/>
+          </a:xfrm>
+          <a:prstGeom prst="rect">
+            <a:avLst/>
+          </a:prstGeom>
+        </p:spPr>
+        <p:style>
+          <a:lnRef idx="1">
+            <a:schemeClr val="accent3"/>
+          </a:lnRef>
+          <a:fillRef idx="2">
+            <a:schemeClr val="accent3"/>
+          </a:fillRef>
+          <a:effectRef idx="1">
+            <a:schemeClr val="accent3"/>
+          </a:effectRef>
+          <a:fontRef idx="minor">
+            <a:schemeClr val="dk1"/>
+          </a:fontRef>
+        </p:style>
+        <p:txBody>
+          <a:bodyPr rtlCol="0" anchor="ctr"/>
+          <a:lstStyle/>
+          <a:p>
+            <a:pPr algn="ctr"/>
+            <a:endParaRPr lang="en-US" dirty="0"/>
+          </a:p>
+        </p:txBody>
+      </p:sp>
+      <p:sp>
+        <p:nvSpPr>
+          <p:cNvPr id="11" name="Rectangle 10">
+            <a:extLst>
+              <a:ext uri="{FF2B5EF4-FFF2-40B4-BE49-F238E27FC236}">
+                <a16:creationId xmlns:a16="http://schemas.microsoft.com/office/drawing/2014/main" id="{F1DCA8B4-2542-18E0-7B1A-4B1004A63BB5}"/>
+              </a:ext>
+            </a:extLst>
+          </p:cNvPr>
+          <p:cNvSpPr/>
+          <p:nvPr/>
+        </p:nvSpPr>
+        <p:spPr>
+          <a:xfrm>
+            <a:off x="4865788" y="4736178"/>
+            <a:ext cx="6660338" cy="707205"/>
+          </a:xfrm>
+          <a:prstGeom prst="rect">
+            <a:avLst/>
+          </a:prstGeom>
+        </p:spPr>
+        <p:style>
+          <a:lnRef idx="1">
+            <a:schemeClr val="accent3"/>
+          </a:lnRef>
+          <a:fillRef idx="2">
+            <a:schemeClr val="accent3"/>
+          </a:fillRef>
+          <a:effectRef idx="1">
+            <a:schemeClr val="accent3"/>
+          </a:effectRef>
+          <a:fontRef idx="minor">
+            <a:schemeClr val="dk1"/>
+          </a:fontRef>
+        </p:style>
+        <p:txBody>
+          <a:bodyPr rtlCol="0" anchor="ctr"/>
+          <a:lstStyle/>
+          <a:p>
+            <a:pPr algn="ctr"/>
+            <a:r>
+              <a:rPr lang="en-US" b="1" dirty="0"/>
+              <a:t>First Priority</a:t>
+            </a:r>
+          </a:p>
+        </p:txBody>
+      </p:sp>
+      <p:sp>
+        <p:nvSpPr>
+          <p:cNvPr id="12" name="TextBox 11">
+            <a:extLst>
+              <a:ext uri="{FF2B5EF4-FFF2-40B4-BE49-F238E27FC236}">
+                <a16:creationId xmlns:a16="http://schemas.microsoft.com/office/drawing/2014/main" id="{F2AF5718-156F-3C34-327C-86E87E2B1577}"/>
+              </a:ext>
+            </a:extLst>
+          </p:cNvPr>
+          <p:cNvSpPr txBox="1"/>
+          <p:nvPr/>
+        </p:nvSpPr>
+        <p:spPr>
+          <a:xfrm>
+            <a:off x="4728916" y="3157382"/>
+            <a:ext cx="1092928" cy="369332"/>
+          </a:xfrm>
+          <a:prstGeom prst="rect">
+            <a:avLst/>
+          </a:prstGeom>
+          <a:noFill/>
+        </p:spPr>
+        <p:txBody>
+          <a:bodyPr wrap="none" rtlCol="0">
+            <a:spAutoFit/>
+          </a:bodyPr>
+          <a:lstStyle/>
+          <a:p>
+            <a:r>
+              <a:rPr lang="en-US" b="1" dirty="0">
+                <a:solidFill>
+                  <a:schemeClr val="bg1"/>
+                </a:solidFill>
+              </a:rPr>
+              <a:t>Call Stack</a:t>
+            </a:r>
+          </a:p>
+        </p:txBody>
+      </p:sp>
+      <p:sp>
+        <p:nvSpPr>
+          <p:cNvPr id="13" name="TextBox 12">
+            <a:extLst>
+              <a:ext uri="{FF2B5EF4-FFF2-40B4-BE49-F238E27FC236}">
+                <a16:creationId xmlns:a16="http://schemas.microsoft.com/office/drawing/2014/main" id="{A0E53CBD-7B4E-C77C-0DDD-47D8025025D8}"/>
+              </a:ext>
+            </a:extLst>
+          </p:cNvPr>
+          <p:cNvSpPr txBox="1"/>
+          <p:nvPr/>
+        </p:nvSpPr>
+        <p:spPr>
+          <a:xfrm>
+            <a:off x="6438744" y="3171248"/>
+            <a:ext cx="1235659" cy="369332"/>
+          </a:xfrm>
+          <a:prstGeom prst="rect">
+            <a:avLst/>
+          </a:prstGeom>
+          <a:noFill/>
+        </p:spPr>
+        <p:txBody>
+          <a:bodyPr wrap="none" rtlCol="0">
+            <a:spAutoFit/>
+          </a:bodyPr>
+          <a:lstStyle/>
+          <a:p>
+            <a:r>
+              <a:rPr lang="en-US" b="1" dirty="0">
+                <a:solidFill>
+                  <a:schemeClr val="bg1"/>
+                </a:solidFill>
+              </a:rPr>
+              <a:t>Event Loop</a:t>
+            </a:r>
+          </a:p>
+        </p:txBody>
+      </p:sp>
+      <p:sp>
+        <p:nvSpPr>
+          <p:cNvPr id="14" name="TextBox 13">
+            <a:extLst>
+              <a:ext uri="{FF2B5EF4-FFF2-40B4-BE49-F238E27FC236}">
+                <a16:creationId xmlns:a16="http://schemas.microsoft.com/office/drawing/2014/main" id="{40800E97-A53C-CDBE-88BD-E95C16FCDBA2}"/>
+              </a:ext>
+            </a:extLst>
+          </p:cNvPr>
+          <p:cNvSpPr txBox="1"/>
+          <p:nvPr/>
+        </p:nvSpPr>
+        <p:spPr>
+          <a:xfrm>
+            <a:off x="9411201" y="3221181"/>
+            <a:ext cx="1443087" cy="369332"/>
+          </a:xfrm>
+          <a:prstGeom prst="rect">
+            <a:avLst/>
+          </a:prstGeom>
+          <a:noFill/>
+        </p:spPr>
+        <p:txBody>
+          <a:bodyPr wrap="none" rtlCol="0">
+            <a:spAutoFit/>
+          </a:bodyPr>
+          <a:lstStyle/>
+          <a:p>
+            <a:r>
+              <a:rPr lang="en-US" b="1" dirty="0">
+                <a:solidFill>
+                  <a:schemeClr val="bg1"/>
+                </a:solidFill>
+              </a:rPr>
+              <a:t>Browser APIs</a:t>
+            </a:r>
+          </a:p>
+        </p:txBody>
+      </p:sp>
+      <p:sp>
+        <p:nvSpPr>
+          <p:cNvPr id="15" name="TextBox 14">
+            <a:extLst>
+              <a:ext uri="{FF2B5EF4-FFF2-40B4-BE49-F238E27FC236}">
+                <a16:creationId xmlns:a16="http://schemas.microsoft.com/office/drawing/2014/main" id="{520A38D3-2EA8-4FC2-114B-E0F9CA60EC7F}"/>
+              </a:ext>
+            </a:extLst>
+          </p:cNvPr>
+          <p:cNvSpPr txBox="1"/>
+          <p:nvPr/>
+        </p:nvSpPr>
+        <p:spPr>
+          <a:xfrm>
+            <a:off x="6844647" y="4337502"/>
+            <a:ext cx="4057812" cy="369332"/>
+          </a:xfrm>
+          <a:prstGeom prst="rect">
+            <a:avLst/>
+          </a:prstGeom>
+          <a:noFill/>
+        </p:spPr>
+        <p:txBody>
+          <a:bodyPr wrap="square" rtlCol="0">
+            <a:spAutoFit/>
+          </a:bodyPr>
+          <a:lstStyle/>
+          <a:p>
+            <a:r>
+              <a:rPr lang="en-US" b="1" dirty="0">
+                <a:solidFill>
+                  <a:schemeClr val="bg1"/>
+                </a:solidFill>
+              </a:rPr>
+              <a:t>Callback Queue/ Task Queue</a:t>
+            </a:r>
+          </a:p>
+        </p:txBody>
+      </p:sp>
+      <p:sp>
+        <p:nvSpPr>
+          <p:cNvPr id="16" name="TextBox 15">
+            <a:extLst>
+              <a:ext uri="{FF2B5EF4-FFF2-40B4-BE49-F238E27FC236}">
+                <a16:creationId xmlns:a16="http://schemas.microsoft.com/office/drawing/2014/main" id="{13D461F3-C5AF-2878-FA99-A7270508821E}"/>
+              </a:ext>
+            </a:extLst>
+          </p:cNvPr>
+          <p:cNvSpPr txBox="1"/>
+          <p:nvPr/>
+        </p:nvSpPr>
+        <p:spPr>
+          <a:xfrm>
+            <a:off x="7015519" y="5493944"/>
+            <a:ext cx="4057812" cy="369332"/>
+          </a:xfrm>
+          <a:prstGeom prst="rect">
+            <a:avLst/>
+          </a:prstGeom>
+          <a:noFill/>
+        </p:spPr>
+        <p:txBody>
+          <a:bodyPr wrap="square" rtlCol="0">
+            <a:spAutoFit/>
+          </a:bodyPr>
+          <a:lstStyle/>
+          <a:p>
+            <a:r>
+              <a:rPr lang="en-US" b="1" dirty="0">
+                <a:solidFill>
+                  <a:schemeClr val="bg1"/>
+                </a:solidFill>
+              </a:rPr>
+              <a:t>Job Queue / Micro Tasks (Promise)</a:t>
+            </a:r>
+          </a:p>
+        </p:txBody>
+      </p:sp>
+      <p:pic>
+        <p:nvPicPr>
+          <p:cNvPr id="18" name="Picture 17">
+            <a:extLst>
+              <a:ext uri="{FF2B5EF4-FFF2-40B4-BE49-F238E27FC236}">
+                <a16:creationId xmlns:a16="http://schemas.microsoft.com/office/drawing/2014/main" id="{52497F4F-BEED-D3C1-69D9-2185D25B17B0}"/>
+              </a:ext>
+            </a:extLst>
+          </p:cNvPr>
+          <p:cNvPicPr>
+            <a:picLocks noChangeAspect="1"/>
+          </p:cNvPicPr>
+          <p:nvPr/>
+        </p:nvPicPr>
+        <p:blipFill>
+          <a:blip r:embed="rId3"/>
+          <a:stretch>
+            <a:fillRect/>
+          </a:stretch>
+        </p:blipFill>
+        <p:spPr>
+          <a:xfrm>
+            <a:off x="434010" y="826702"/>
+            <a:ext cx="2552700" cy="1552575"/>
+          </a:xfrm>
+          <a:prstGeom prst="rect">
+            <a:avLst/>
+          </a:prstGeom>
+        </p:spPr>
+      </p:pic>
+      <p:pic>
+        <p:nvPicPr>
+          <p:cNvPr id="20" name="Picture 19">
+            <a:extLst>
+              <a:ext uri="{FF2B5EF4-FFF2-40B4-BE49-F238E27FC236}">
+                <a16:creationId xmlns:a16="http://schemas.microsoft.com/office/drawing/2014/main" id="{3883D7FA-0961-8EA9-7A4F-9C8A31512568}"/>
+              </a:ext>
+            </a:extLst>
+          </p:cNvPr>
+          <p:cNvPicPr>
+            <a:picLocks noChangeAspect="1"/>
+          </p:cNvPicPr>
+          <p:nvPr/>
+        </p:nvPicPr>
+        <p:blipFill>
+          <a:blip r:embed="rId4"/>
+          <a:stretch>
+            <a:fillRect/>
+          </a:stretch>
+        </p:blipFill>
+        <p:spPr>
+          <a:xfrm>
+            <a:off x="434010" y="2700851"/>
+            <a:ext cx="3943350" cy="2057400"/>
+          </a:xfrm>
+          <a:prstGeom prst="rect">
+            <a:avLst/>
+          </a:prstGeom>
+        </p:spPr>
+      </p:pic>
+      <p:sp>
+        <p:nvSpPr>
+          <p:cNvPr id="21" name="Rectangle 20">
+            <a:extLst>
+              <a:ext uri="{FF2B5EF4-FFF2-40B4-BE49-F238E27FC236}">
+                <a16:creationId xmlns:a16="http://schemas.microsoft.com/office/drawing/2014/main" id="{D67E9F6A-9110-7B4A-7799-7EC1E96B56EE}"/>
+              </a:ext>
+            </a:extLst>
+          </p:cNvPr>
+          <p:cNvSpPr/>
+          <p:nvPr/>
+        </p:nvSpPr>
+        <p:spPr>
+          <a:xfrm>
+            <a:off x="273606" y="5079826"/>
+            <a:ext cx="4455310" cy="1552574"/>
+          </a:xfrm>
+          <a:prstGeom prst="rect">
+            <a:avLst/>
+          </a:prstGeom>
+          <a:solidFill>
+            <a:schemeClr val="bg2"/>
+          </a:solidFill>
+        </p:spPr>
+        <p:style>
+          <a:lnRef idx="2">
+            <a:schemeClr val="accent1">
+              <a:shade val="15000"/>
+            </a:schemeClr>
+          </a:lnRef>
+          <a:fillRef idx="1">
+            <a:schemeClr val="accent1"/>
+          </a:fillRef>
+          <a:effectRef idx="0">
+            <a:schemeClr val="accent1"/>
+          </a:effectRef>
+          <a:fontRef idx="minor">
+            <a:schemeClr val="lt1"/>
+          </a:fontRef>
+        </p:style>
+        <p:txBody>
+          <a:bodyPr rtlCol="0" anchor="ctr"/>
+          <a:lstStyle/>
+          <a:p>
+            <a:pPr algn="ctr"/>
+            <a:endParaRPr lang="en-US" dirty="0"/>
+          </a:p>
+        </p:txBody>
+      </p:sp>
+      <p:sp>
+        <p:nvSpPr>
+          <p:cNvPr id="22" name="TextBox 21">
+            <a:extLst>
+              <a:ext uri="{FF2B5EF4-FFF2-40B4-BE49-F238E27FC236}">
+                <a16:creationId xmlns:a16="http://schemas.microsoft.com/office/drawing/2014/main" id="{B6E82889-2863-7C5B-783F-87AAD190DFC2}"/>
+              </a:ext>
+            </a:extLst>
+          </p:cNvPr>
+          <p:cNvSpPr txBox="1"/>
+          <p:nvPr/>
+        </p:nvSpPr>
+        <p:spPr>
+          <a:xfrm>
+            <a:off x="336967" y="5186466"/>
+            <a:ext cx="654346" cy="369332"/>
+          </a:xfrm>
+          <a:prstGeom prst="rect">
+            <a:avLst/>
+          </a:prstGeom>
+          <a:noFill/>
+        </p:spPr>
+        <p:txBody>
+          <a:bodyPr wrap="none" rtlCol="0">
+            <a:spAutoFit/>
+          </a:bodyPr>
+          <a:lstStyle/>
+          <a:p>
+            <a:r>
+              <a:rPr lang="en-US" dirty="0"/>
+              <a:t>main</a:t>
+            </a:r>
+          </a:p>
+        </p:txBody>
+      </p:sp>
+      <p:sp>
+        <p:nvSpPr>
+          <p:cNvPr id="23" name="TextBox 22">
+            <a:extLst>
+              <a:ext uri="{FF2B5EF4-FFF2-40B4-BE49-F238E27FC236}">
+                <a16:creationId xmlns:a16="http://schemas.microsoft.com/office/drawing/2014/main" id="{2D9A0C20-F2E2-985E-E0C6-4BED80BF031A}"/>
+              </a:ext>
+            </a:extLst>
+          </p:cNvPr>
+          <p:cNvSpPr txBox="1"/>
+          <p:nvPr/>
+        </p:nvSpPr>
+        <p:spPr>
+          <a:xfrm>
+            <a:off x="336967" y="5501441"/>
+            <a:ext cx="1041259" cy="369332"/>
+          </a:xfrm>
+          <a:prstGeom prst="rect">
+            <a:avLst/>
+          </a:prstGeom>
+          <a:noFill/>
+        </p:spPr>
+        <p:txBody>
+          <a:bodyPr wrap="square" rtlCol="0">
+            <a:spAutoFit/>
+          </a:bodyPr>
+          <a:lstStyle/>
+          <a:p>
+            <a:r>
+              <a:rPr lang="en-US" dirty="0"/>
+              <a:t>Hello f2</a:t>
+            </a:r>
+          </a:p>
+        </p:txBody>
+      </p:sp>
+      <p:sp>
+        <p:nvSpPr>
+          <p:cNvPr id="24" name="TextBox 23">
+            <a:extLst>
+              <a:ext uri="{FF2B5EF4-FFF2-40B4-BE49-F238E27FC236}">
+                <a16:creationId xmlns:a16="http://schemas.microsoft.com/office/drawing/2014/main" id="{D8DC70E5-D82D-D5E2-68A4-3532A245A41B}"/>
+              </a:ext>
+            </a:extLst>
+          </p:cNvPr>
+          <p:cNvSpPr txBox="1"/>
+          <p:nvPr/>
+        </p:nvSpPr>
+        <p:spPr>
+          <a:xfrm>
+            <a:off x="336966" y="5864207"/>
+            <a:ext cx="3002582" cy="369332"/>
+          </a:xfrm>
+          <a:prstGeom prst="rect">
+            <a:avLst/>
+          </a:prstGeom>
+          <a:noFill/>
+        </p:spPr>
+        <p:txBody>
+          <a:bodyPr wrap="square" rtlCol="0">
+            <a:spAutoFit/>
+          </a:bodyPr>
+          <a:lstStyle/>
+          <a:p>
+            <a:r>
+              <a:rPr lang="en-US" dirty="0"/>
+              <a:t>I am a promise</a:t>
+            </a:r>
+          </a:p>
+        </p:txBody>
+      </p:sp>
+      <p:sp>
+        <p:nvSpPr>
+          <p:cNvPr id="25" name="TextBox 24">
+            <a:extLst>
+              <a:ext uri="{FF2B5EF4-FFF2-40B4-BE49-F238E27FC236}">
+                <a16:creationId xmlns:a16="http://schemas.microsoft.com/office/drawing/2014/main" id="{F9A1FC64-8174-EDB8-53A5-3BCBB27DC4E7}"/>
+              </a:ext>
+            </a:extLst>
+          </p:cNvPr>
+          <p:cNvSpPr txBox="1"/>
+          <p:nvPr/>
+        </p:nvSpPr>
+        <p:spPr>
+          <a:xfrm>
+            <a:off x="336967" y="6226973"/>
+            <a:ext cx="1041259" cy="369332"/>
+          </a:xfrm>
+          <a:prstGeom prst="rect">
+            <a:avLst/>
+          </a:prstGeom>
+          <a:noFill/>
+        </p:spPr>
+        <p:txBody>
+          <a:bodyPr wrap="square" rtlCol="0">
+            <a:spAutoFit/>
+          </a:bodyPr>
+          <a:lstStyle/>
+          <a:p>
+            <a:r>
+              <a:rPr lang="en-US" dirty="0"/>
+              <a:t>Hello f1</a:t>
+            </a:r>
+          </a:p>
+        </p:txBody>
+      </p:sp>
+    </p:spTree>
+    <p:extLst>
+      <p:ext uri="{BB962C8B-B14F-4D97-AF65-F5344CB8AC3E}">
+        <p14:creationId xmlns:p14="http://schemas.microsoft.com/office/powerpoint/2010/main" val="539371380"/>
+      </p:ext>
+    </p:extLst>
+  </p:cSld>
+  <p:clrMapOvr>
+    <a:masterClrMapping/>
+  </p:clrMapOvr>
+  <p:timing>
+    <p:tnLst>
+      <p:par>
+        <p:cTn id="1" dur="indefinite" restart="never" nodeType="tmRoot">
+          <p:childTnLst>
+            <p:seq concurrent="1" nextAc="seek">
+              <p:cTn id="2" dur="indefinite" nodeType="mainSeq">
+                <p:childTnLst>
+                  <p:par>
+                    <p:cTn id="3" fill="hold">
+                      <p:stCondLst>
+                        <p:cond delay="indefinite"/>
+                      </p:stCondLst>
+                      <p:childTnLst>
+                        <p:par>
+                          <p:cTn id="4" fill="hold">
+                            <p:stCondLst>
+                              <p:cond delay="0"/>
+                            </p:stCondLst>
+                            <p:childTnLst>
+                              <p:par>
+                                <p:cTn id="5" presetID="1" presetClass="entr" presetSubtype="0" fill="hold" grpId="0" nodeType="clickEffect">
+                                  <p:stCondLst>
+                                    <p:cond delay="0"/>
+                                  </p:stCondLst>
+                                  <p:childTnLst>
+                                    <p:set>
+                                      <p:cBhvr>
+                                        <p:cTn id="6" dur="1" fill="hold">
+                                          <p:stCondLst>
+                                            <p:cond delay="0"/>
+                                          </p:stCondLst>
+                                        </p:cTn>
+                                        <p:tgtEl>
+                                          <p:spTgt spid="22"/>
+                                        </p:tgtEl>
+                                        <p:attrNameLst>
+                                          <p:attrName>style.visibility</p:attrName>
+                                        </p:attrNameLst>
+                                      </p:cBhvr>
+                                      <p:to>
+                                        <p:strVal val="visible"/>
+                                      </p:to>
+                                    </p:set>
+                                  </p:childTnLst>
+                                </p:cTn>
+                              </p:par>
+                            </p:childTnLst>
+                          </p:cTn>
+                        </p:par>
+                      </p:childTnLst>
+                    </p:cTn>
+                  </p:par>
+                  <p:par>
+                    <p:cTn id="7" fill="hold">
+                      <p:stCondLst>
+                        <p:cond delay="indefinite"/>
+                      </p:stCondLst>
+                      <p:childTnLst>
+                        <p:par>
+                          <p:cTn id="8" fill="hold">
+                            <p:stCondLst>
+                              <p:cond delay="0"/>
+                            </p:stCondLst>
+                            <p:childTnLst>
+                              <p:par>
+                                <p:cTn id="9" presetID="1" presetClass="entr" presetSubtype="0" fill="hold" grpId="0" nodeType="clickEffect">
+                                  <p:stCondLst>
+                                    <p:cond delay="0"/>
+                                  </p:stCondLst>
+                                  <p:childTnLst>
+                                    <p:set>
+                                      <p:cBhvr>
+                                        <p:cTn id="10" dur="1" fill="hold">
+                                          <p:stCondLst>
+                                            <p:cond delay="0"/>
+                                          </p:stCondLst>
+                                        </p:cTn>
+                                        <p:tgtEl>
+                                          <p:spTgt spid="23"/>
+                                        </p:tgtEl>
+                                        <p:attrNameLst>
+                                          <p:attrName>style.visibility</p:attrName>
+                                        </p:attrNameLst>
+                                      </p:cBhvr>
+                                      <p:to>
+                                        <p:strVal val="visible"/>
+                                      </p:to>
+                                    </p:set>
+                                  </p:childTnLst>
+                                </p:cTn>
+                              </p:par>
+                            </p:childTnLst>
+                          </p:cTn>
+                        </p:par>
+                      </p:childTnLst>
+                    </p:cTn>
+                  </p:par>
+                  <p:par>
+                    <p:cTn id="11" fill="hold">
+                      <p:stCondLst>
+                        <p:cond delay="indefinite"/>
+                      </p:stCondLst>
+                      <p:childTnLst>
+                        <p:par>
+                          <p:cTn id="12" fill="hold">
+                            <p:stCondLst>
+                              <p:cond delay="0"/>
+                            </p:stCondLst>
+                            <p:childTnLst>
+                              <p:par>
+                                <p:cTn id="13" presetID="1" presetClass="entr" presetSubtype="0" fill="hold" grpId="0" nodeType="clickEffect">
+                                  <p:stCondLst>
+                                    <p:cond delay="0"/>
+                                  </p:stCondLst>
+                                  <p:childTnLst>
+                                    <p:set>
+                                      <p:cBhvr>
+                                        <p:cTn id="14" dur="1" fill="hold">
+                                          <p:stCondLst>
+                                            <p:cond delay="0"/>
+                                          </p:stCondLst>
+                                        </p:cTn>
+                                        <p:tgtEl>
+                                          <p:spTgt spid="24"/>
+                                        </p:tgtEl>
+                                        <p:attrNameLst>
+                                          <p:attrName>style.visibility</p:attrName>
+                                        </p:attrNameLst>
+                                      </p:cBhvr>
+                                      <p:to>
+                                        <p:strVal val="visible"/>
+                                      </p:to>
+                                    </p:set>
+                                  </p:childTnLst>
+                                </p:cTn>
+                              </p:par>
+                            </p:childTnLst>
+                          </p:cTn>
+                        </p:par>
+                      </p:childTnLst>
+                    </p:cTn>
+                  </p:par>
+                  <p:par>
+                    <p:cTn id="15" fill="hold">
+                      <p:stCondLst>
+                        <p:cond delay="indefinite"/>
+                      </p:stCondLst>
+                      <p:childTnLst>
+                        <p:par>
+                          <p:cTn id="16" fill="hold">
+                            <p:stCondLst>
+                              <p:cond delay="0"/>
+                            </p:stCondLst>
+                            <p:childTnLst>
+                              <p:par>
+                                <p:cTn id="17" presetID="1" presetClass="entr" presetSubtype="0" fill="hold" grpId="0" nodeType="clickEffect">
+                                  <p:stCondLst>
+                                    <p:cond delay="0"/>
+                                  </p:stCondLst>
+                                  <p:childTnLst>
+                                    <p:set>
+                                      <p:cBhvr>
+                                        <p:cTn id="18" dur="1" fill="hold">
+                                          <p:stCondLst>
+                                            <p:cond delay="0"/>
+                                          </p:stCondLst>
+                                        </p:cTn>
+                                        <p:tgtEl>
+                                          <p:spTgt spid="25"/>
+                                        </p:tgtEl>
+                                        <p:attrNameLst>
+                                          <p:attrName>style.visibility</p:attrName>
+                                        </p:attrNameLst>
+                                      </p:cBhvr>
+                                      <p:to>
+                                        <p:strVal val="visible"/>
+                                      </p:to>
+                                    </p:set>
+                                  </p:childTnLst>
+                                </p:cTn>
+                              </p:par>
+                            </p:childTnLst>
+                          </p:cTn>
+                        </p:par>
+                      </p:childTnLst>
+                    </p:cTn>
+                  </p:par>
+                </p:childTnLst>
+              </p:cTn>
+              <p:prevCondLst>
+                <p:cond evt="onPrev" delay="0">
+                  <p:tgtEl>
+                    <p:sldTgt/>
+                  </p:tgtEl>
+                </p:cond>
+              </p:prevCondLst>
+              <p:nextCondLst>
+                <p:cond evt="onNext" delay="0">
+                  <p:tgtEl>
+                    <p:sldTgt/>
+                  </p:tgtEl>
+                </p:cond>
+              </p:nextCondLst>
+            </p:seq>
+          </p:childTnLst>
+        </p:cTn>
+      </p:par>
+    </p:tnLst>
+    <p:bldLst>
+      <p:bldP spid="22" grpId="0"/>
+      <p:bldP spid="23" grpId="0"/>
+      <p:bldP spid="24" grpId="0"/>
+      <p:bldP spid="25" grpId="0"/>
+    </p:bldLst>
+  </p:timing>
+</p:sld>
+</file>
+
+<file path=ppt/slides/slide8.xml><?xml version="1.0" encoding="utf-8"?>
+<p:sld xmlns:a="http://schemas.openxmlformats.org/drawingml/2006/main" xmlns:r="http://schemas.openxmlformats.org/officeDocument/2006/relationships" xmlns:p="http://schemas.openxmlformats.org/presentationml/2006/main">
+  <p:cSld>
+    <p:bg>
+      <p:bgPr>
+        <a:solidFill>
+          <a:schemeClr val="tx1">
+            <a:lumMod val="95000"/>
+            <a:lumOff val="5000"/>
+          </a:schemeClr>
+        </a:solidFill>
+        <a:effectLst/>
+      </p:bgPr>
+    </p:bg>
+    <p:spTree>
+      <p:nvGrpSpPr>
+        <p:cNvPr id="1" name=""/>
+        <p:cNvGrpSpPr/>
+        <p:nvPr/>
+      </p:nvGrpSpPr>
+      <p:grpSpPr>
+        <a:xfrm>
+          <a:off x="0" y="0"/>
+          <a:ext cx="0" cy="0"/>
+          <a:chOff x="0" y="0"/>
+          <a:chExt cx="0" cy="0"/>
+        </a:xfrm>
+      </p:grpSpPr>
+      <p:pic>
+        <p:nvPicPr>
+          <p:cNvPr id="3" name="Picture 2">
+            <a:extLst>
+              <a:ext uri="{FF2B5EF4-FFF2-40B4-BE49-F238E27FC236}">
+                <a16:creationId xmlns:a16="http://schemas.microsoft.com/office/drawing/2014/main" id="{0B27F54F-DF3A-8D21-F1D3-0B55434144AE}"/>
+              </a:ext>
+            </a:extLst>
+          </p:cNvPr>
+          <p:cNvPicPr>
+            <a:picLocks noChangeAspect="1"/>
+          </p:cNvPicPr>
+          <p:nvPr/>
+        </p:nvPicPr>
+        <p:blipFill>
+          <a:blip r:embed="rId2"/>
+          <a:stretch>
+            <a:fillRect/>
+          </a:stretch>
+        </p:blipFill>
+        <p:spPr>
+          <a:xfrm>
+            <a:off x="817538" y="352648"/>
+            <a:ext cx="3121416" cy="2907986"/>
+          </a:xfrm>
+          <a:prstGeom prst="rect">
+            <a:avLst/>
+          </a:prstGeom>
+        </p:spPr>
+      </p:pic>
+      <p:sp>
+        <p:nvSpPr>
+          <p:cNvPr id="6" name="Rectangle 5">
+            <a:extLst>
+              <a:ext uri="{FF2B5EF4-FFF2-40B4-BE49-F238E27FC236}">
+                <a16:creationId xmlns:a16="http://schemas.microsoft.com/office/drawing/2014/main" id="{E7AF756A-56F0-057C-08AA-9B94C8A7887E}"/>
+              </a:ext>
+            </a:extLst>
+          </p:cNvPr>
+          <p:cNvSpPr/>
+          <p:nvPr/>
+        </p:nvSpPr>
+        <p:spPr>
+          <a:xfrm>
+            <a:off x="273606" y="3597367"/>
+            <a:ext cx="4045176" cy="2907986"/>
+          </a:xfrm>
+          <a:prstGeom prst="rect">
+            <a:avLst/>
+          </a:prstGeom>
+          <a:solidFill>
+            <a:schemeClr val="bg2"/>
+          </a:solidFill>
+        </p:spPr>
+        <p:style>
+          <a:lnRef idx="2">
+            <a:schemeClr val="accent1">
+              <a:shade val="15000"/>
+            </a:schemeClr>
+          </a:lnRef>
+          <a:fillRef idx="1">
+            <a:schemeClr val="accent1"/>
+          </a:fillRef>
+          <a:effectRef idx="0">
+            <a:schemeClr val="accent1"/>
+          </a:effectRef>
+          <a:fontRef idx="minor">
+            <a:schemeClr val="lt1"/>
+          </a:fontRef>
+        </p:style>
+        <p:txBody>
+          <a:bodyPr rtlCol="0" anchor="ctr"/>
+          <a:lstStyle/>
+          <a:p>
+            <a:pPr algn="ctr"/>
+            <a:r>
+              <a:rPr lang="en-US" b="1" dirty="0">
+                <a:solidFill>
+                  <a:schemeClr val="tx1"/>
+                </a:solidFill>
+              </a:rPr>
+              <a:t>Main</a:t>
+            </a:r>
+          </a:p>
+          <a:p>
+            <a:pPr algn="ctr"/>
+            <a:r>
+              <a:rPr lang="en-US" b="1" dirty="0">
+                <a:solidFill>
+                  <a:schemeClr val="tx1"/>
+                </a:solidFill>
+              </a:rPr>
+              <a:t>F2</a:t>
+            </a:r>
+          </a:p>
+          <a:p>
+            <a:pPr algn="ctr"/>
+            <a:r>
+              <a:rPr lang="en-US" b="1" dirty="0">
+                <a:solidFill>
+                  <a:schemeClr val="tx1"/>
+                </a:solidFill>
+              </a:rPr>
+              <a:t>I am promise 1</a:t>
+            </a:r>
+          </a:p>
+          <a:p>
+            <a:pPr algn="ctr"/>
+            <a:r>
+              <a:rPr lang="en-US" b="1" dirty="0">
+                <a:solidFill>
+                  <a:schemeClr val="tx1"/>
+                </a:solidFill>
+              </a:rPr>
+              <a:t>I am promise 2</a:t>
+            </a:r>
+          </a:p>
+          <a:p>
+            <a:pPr algn="ctr"/>
+            <a:r>
+              <a:rPr lang="en-US" b="1" dirty="0">
+                <a:solidFill>
+                  <a:schemeClr val="tx1"/>
+                </a:solidFill>
+              </a:rPr>
+              <a:t>F3</a:t>
+            </a:r>
+          </a:p>
+          <a:p>
+            <a:pPr algn="ctr"/>
+            <a:r>
+              <a:rPr lang="en-US" b="1" dirty="0">
+                <a:solidFill>
+                  <a:schemeClr val="tx1"/>
+                </a:solidFill>
+              </a:rPr>
+              <a:t>F1</a:t>
+            </a:r>
+          </a:p>
+          <a:p>
+            <a:pPr algn="ctr"/>
+            <a:endParaRPr lang="en-US" b="1" dirty="0">
+              <a:solidFill>
+                <a:schemeClr val="tx1"/>
+              </a:solidFill>
+            </a:endParaRPr>
+          </a:p>
+        </p:txBody>
+      </p:sp>
+      <p:pic>
+        <p:nvPicPr>
+          <p:cNvPr id="8" name="Picture 7">
+            <a:extLst>
+              <a:ext uri="{FF2B5EF4-FFF2-40B4-BE49-F238E27FC236}">
+                <a16:creationId xmlns:a16="http://schemas.microsoft.com/office/drawing/2014/main" id="{ED9E9E86-CB28-B023-E865-B0DC854AAD79}"/>
+              </a:ext>
+            </a:extLst>
+          </p:cNvPr>
+          <p:cNvPicPr>
+            <a:picLocks noChangeAspect="1"/>
+          </p:cNvPicPr>
+          <p:nvPr/>
+        </p:nvPicPr>
+        <p:blipFill>
+          <a:blip r:embed="rId3"/>
+          <a:stretch>
+            <a:fillRect/>
+          </a:stretch>
+        </p:blipFill>
+        <p:spPr>
+          <a:xfrm>
+            <a:off x="4656698" y="420753"/>
+            <a:ext cx="6717763" cy="4402858"/>
+          </a:xfrm>
+          <a:prstGeom prst="rect">
+            <a:avLst/>
+          </a:prstGeom>
+        </p:spPr>
+      </p:pic>
+    </p:spTree>
+    <p:extLst>
+      <p:ext uri="{BB962C8B-B14F-4D97-AF65-F5344CB8AC3E}">
+        <p14:creationId xmlns:p14="http://schemas.microsoft.com/office/powerpoint/2010/main" val="4178135730"/>
+      </p:ext>
+    </p:extLst>
+  </p:cSld>
+  <p:clrMapOvr>
+    <a:masterClrMapping/>
+  </p:clrMapOvr>
+  <p:timing>
+    <p:tnLst>
+      <p:par>
+        <p:cTn id="1" dur="indefinite" restart="never" nodeType="tmRoot">
+          <p:childTnLst>
+            <p:seq concurrent="1" nextAc="seek">
+              <p:cTn id="2" dur="indefinite" nodeType="mainSeq">
+                <p:childTnLst>
+                  <p:par>
+                    <p:cTn id="3" fill="hold">
+                      <p:stCondLst>
+                        <p:cond delay="indefinite"/>
+                      </p:stCondLst>
+                      <p:childTnLst>
+                        <p:par>
+                          <p:cTn id="4" fill="hold">
+                            <p:stCondLst>
+                              <p:cond delay="0"/>
+                            </p:stCondLst>
+                            <p:childTnLst>
+                              <p:par>
+                                <p:cTn id="5" presetID="1" presetClass="entr" presetSubtype="0" fill="hold" grpId="0" nodeType="clickEffect">
+                                  <p:stCondLst>
+                                    <p:cond delay="0"/>
+                                  </p:stCondLst>
+                                  <p:childTnLst>
+                                    <p:set>
+                                      <p:cBhvr>
+                                        <p:cTn id="6" dur="1" fill="hold">
+                                          <p:stCondLst>
+                                            <p:cond delay="0"/>
+                                          </p:stCondLst>
+                                        </p:cTn>
+                                        <p:tgtEl>
+                                          <p:spTgt spid="6"/>
+                                        </p:tgtEl>
+                                        <p:attrNameLst>
+                                          <p:attrName>style.visibility</p:attrName>
+                                        </p:attrNameLst>
+                                      </p:cBhvr>
+                                      <p:to>
+                                        <p:strVal val="visible"/>
+                                      </p:to>
+                                    </p:set>
+                                  </p:childTnLst>
+                                </p:cTn>
+                              </p:par>
+                            </p:childTnLst>
+                          </p:cTn>
+                        </p:par>
+                      </p:childTnLst>
+                    </p:cTn>
+                  </p:par>
+                </p:childTnLst>
+              </p:cTn>
+              <p:prevCondLst>
+                <p:cond evt="onPrev" delay="0">
+                  <p:tgtEl>
+                    <p:sldTgt/>
+                  </p:tgtEl>
+                </p:cond>
+              </p:prevCondLst>
+              <p:nextCondLst>
+                <p:cond evt="onNext" delay="0">
+                  <p:tgtEl>
+                    <p:sldTgt/>
+                  </p:tgtEl>
+                </p:cond>
+              </p:nextCondLst>
+            </p:seq>
+          </p:childTnLst>
+        </p:cTn>
+      </p:par>
+    </p:tnLst>
+    <p:bldLst>
+      <p:bldP spid="6" grpId="0" animBg="1"/>
+    </p:bldLst>
+  </p:timing>
+</p:sld>
+</file>
+
+<file path=ppt/slides/slide9.xml><?xml version="1.0" encoding="utf-8"?>
+<p:sld xmlns:a="http://schemas.openxmlformats.org/drawingml/2006/main" xmlns:r="http://schemas.openxmlformats.org/officeDocument/2006/relationships" xmlns:p="http://schemas.openxmlformats.org/presentationml/2006/main">
   <p:cSld name="Slide 8">
     <p:bg>
       <p:bgPr>
@@ -9523,1697 +12543,6 @@
               <a:t>The Event Loop always checks the Job Queue before the Callback Queue</a:t>
             </a:r>
             <a:endParaRPr lang="en-US" sz="1350" dirty="0"/>
-          </a:p>
-        </p:txBody>
-      </p:sp>
-    </p:spTree>
-  </p:cSld>
-  <p:clrMapOvr>
-    <a:masterClrMapping/>
-  </p:clrMapOvr>
-</p:sld>
-</file>
-
-<file path=ppt/slides/slide8.xml><?xml version="1.0" encoding="utf-8"?>
-<p:sld xmlns:a="http://schemas.openxmlformats.org/drawingml/2006/main" xmlns:r="http://schemas.openxmlformats.org/officeDocument/2006/relationships" xmlns:p="http://schemas.openxmlformats.org/presentationml/2006/main">
-  <p:cSld name="Slide 9">
-    <p:bg>
-      <p:bgPr>
-        <a:solidFill>
-          <a:srgbClr val="F7F7F5"/>
-        </a:solidFill>
-        <a:effectLst/>
-      </p:bgPr>
-    </p:bg>
-    <p:spTree>
-      <p:nvGrpSpPr>
-        <p:cNvPr id="1" name=""/>
-        <p:cNvGrpSpPr/>
-        <p:nvPr/>
-      </p:nvGrpSpPr>
-      <p:grpSpPr>
-        <a:xfrm>
-          <a:off x="0" y="0"/>
-          <a:ext cx="0" cy="0"/>
-          <a:chOff x="0" y="0"/>
-          <a:chExt cx="0" cy="0"/>
-        </a:xfrm>
-      </p:grpSpPr>
-      <p:sp>
-        <p:nvSpPr>
-          <p:cNvPr id="2" name="Text 0"/>
-          <p:cNvSpPr/>
-          <p:nvPr/>
-        </p:nvSpPr>
-        <p:spPr>
-          <a:xfrm>
-            <a:off x="548640" y="365760"/>
-            <a:ext cx="7315200" cy="365760"/>
-          </a:xfrm>
-          <a:prstGeom prst="rect">
-            <a:avLst/>
-          </a:prstGeom>
-          <a:noFill/>
-          <a:ln/>
-        </p:spPr>
-        <p:txBody>
-          <a:bodyPr wrap="square" rtlCol="0" anchor="ctr"/>
-          <a:lstStyle/>
-          <a:p>
-            <a:pPr marL="0" indent="0">
-              <a:buNone/>
-            </a:pPr>
-            <a:r>
-              <a:rPr lang="en-US" sz="1200" b="1" kern="0" spc="200" dirty="0">
-                <a:solidFill>
-                  <a:srgbClr val="2EC4B6"/>
-                </a:solidFill>
-                <a:latin typeface="Calibri" pitchFamily="34" charset="0"/>
-                <a:ea typeface="Calibri" pitchFamily="34" charset="-122"/>
-                <a:cs typeface="Calibri" pitchFamily="34" charset="-120"/>
-              </a:rPr>
-              <a:t>MEMORIZE THESE</a:t>
-            </a:r>
-            <a:endParaRPr lang="en-US" sz="1200" dirty="0"/>
-          </a:p>
-        </p:txBody>
-      </p:sp>
-      <p:sp>
-        <p:nvSpPr>
-          <p:cNvPr id="3" name="Text 1"/>
-          <p:cNvSpPr/>
-          <p:nvPr/>
-        </p:nvSpPr>
-        <p:spPr>
-          <a:xfrm>
-            <a:off x="548640" y="685800"/>
-            <a:ext cx="10515600" cy="822960"/>
-          </a:xfrm>
-          <a:prstGeom prst="rect">
-            <a:avLst/>
-          </a:prstGeom>
-          <a:noFill/>
-          <a:ln/>
-        </p:spPr>
-        <p:txBody>
-          <a:bodyPr wrap="square" rtlCol="0" anchor="ctr"/>
-          <a:lstStyle/>
-          <a:p>
-            <a:pPr marL="0" indent="0">
-              <a:buNone/>
-            </a:pPr>
-            <a:r>
-              <a:rPr lang="en-US" sz="3000" b="1" dirty="0">
-                <a:solidFill>
-                  <a:srgbClr val="1B1F3B"/>
-                </a:solidFill>
-                <a:latin typeface="Bookman Old Style" pitchFamily="34" charset="0"/>
-                <a:ea typeface="Bookman Old Style" pitchFamily="34" charset="-122"/>
-                <a:cs typeface="Bookman Old Style" pitchFamily="34" charset="-120"/>
-              </a:rPr>
-              <a:t>The Event Loop Rules</a:t>
-            </a:r>
-            <a:endParaRPr lang="en-US" sz="3000" dirty="0"/>
-          </a:p>
-        </p:txBody>
-      </p:sp>
-      <p:sp>
-        <p:nvSpPr>
-          <p:cNvPr id="4" name="Shape 2"/>
-          <p:cNvSpPr/>
-          <p:nvPr/>
-        </p:nvSpPr>
-        <p:spPr>
-          <a:xfrm>
-            <a:off x="548640" y="1691640"/>
-            <a:ext cx="457200" cy="457200"/>
-          </a:xfrm>
-          <a:prstGeom prst="roundRect">
-            <a:avLst>
-              <a:gd name="adj" fmla="val 16000"/>
-            </a:avLst>
-          </a:prstGeom>
-          <a:solidFill>
-            <a:srgbClr val="1B1F3B"/>
-          </a:solidFill>
-          <a:ln/>
-        </p:spPr>
-      </p:sp>
-      <p:sp>
-        <p:nvSpPr>
-          <p:cNvPr id="5" name="Text 3"/>
-          <p:cNvSpPr/>
-          <p:nvPr/>
-        </p:nvSpPr>
-        <p:spPr>
-          <a:xfrm>
-            <a:off x="548640" y="1691640"/>
-            <a:ext cx="457200" cy="457200"/>
-          </a:xfrm>
-          <a:prstGeom prst="rect">
-            <a:avLst/>
-          </a:prstGeom>
-          <a:noFill/>
-          <a:ln/>
-        </p:spPr>
-        <p:txBody>
-          <a:bodyPr wrap="square" rtlCol="0" anchor="ctr"/>
-          <a:lstStyle/>
-          <a:p>
-            <a:pPr marL="0" indent="0" algn="ctr">
-              <a:buNone/>
-            </a:pPr>
-            <a:r>
-              <a:rPr lang="en-US" sz="1500" b="1" dirty="0">
-                <a:solidFill>
-                  <a:srgbClr val="FFFFFF"/>
-                </a:solidFill>
-                <a:latin typeface="Calibri" pitchFamily="34" charset="0"/>
-                <a:ea typeface="Calibri" pitchFamily="34" charset="-122"/>
-                <a:cs typeface="Calibri" pitchFamily="34" charset="-120"/>
-              </a:rPr>
-              <a:t>1</a:t>
-            </a:r>
-            <a:endParaRPr lang="en-US" sz="1500" dirty="0"/>
-          </a:p>
-        </p:txBody>
-      </p:sp>
-      <p:sp>
-        <p:nvSpPr>
-          <p:cNvPr id="6" name="Text 4"/>
-          <p:cNvSpPr/>
-          <p:nvPr/>
-        </p:nvSpPr>
-        <p:spPr>
-          <a:xfrm>
-            <a:off x="1188720" y="1664208"/>
-            <a:ext cx="10424160" cy="548640"/>
-          </a:xfrm>
-          <a:prstGeom prst="rect">
-            <a:avLst/>
-          </a:prstGeom>
-          <a:noFill/>
-          <a:ln/>
-        </p:spPr>
-        <p:txBody>
-          <a:bodyPr wrap="square" rtlCol="0" anchor="t"/>
-          <a:lstStyle/>
-          <a:p>
-            <a:pPr marL="0" indent="0">
-              <a:buNone/>
-            </a:pPr>
-            <a:r>
-              <a:rPr lang="en-US" sz="1400" dirty="0">
-                <a:solidFill>
-                  <a:srgbClr val="1B1F3B"/>
-                </a:solidFill>
-                <a:latin typeface="Calibri" pitchFamily="34" charset="0"/>
-                <a:ea typeface="Calibri" pitchFamily="34" charset="-122"/>
-                <a:cs typeface="Calibri" pitchFamily="34" charset="-120"/>
-              </a:rPr>
-              <a:t>Call stack code always runs first, in strict LIFO order.</a:t>
-            </a:r>
-            <a:endParaRPr lang="en-US" sz="1400" dirty="0"/>
-          </a:p>
-        </p:txBody>
-      </p:sp>
-      <p:sp>
-        <p:nvSpPr>
-          <p:cNvPr id="7" name="Shape 5"/>
-          <p:cNvSpPr/>
-          <p:nvPr/>
-        </p:nvSpPr>
-        <p:spPr>
-          <a:xfrm>
-            <a:off x="548640" y="2377440"/>
-            <a:ext cx="457200" cy="457200"/>
-          </a:xfrm>
-          <a:prstGeom prst="roundRect">
-            <a:avLst>
-              <a:gd name="adj" fmla="val 16000"/>
-            </a:avLst>
-          </a:prstGeom>
-          <a:solidFill>
-            <a:srgbClr val="1B1F3B"/>
-          </a:solidFill>
-          <a:ln/>
-        </p:spPr>
-      </p:sp>
-      <p:sp>
-        <p:nvSpPr>
-          <p:cNvPr id="8" name="Text 6"/>
-          <p:cNvSpPr/>
-          <p:nvPr/>
-        </p:nvSpPr>
-        <p:spPr>
-          <a:xfrm>
-            <a:off x="548640" y="2377440"/>
-            <a:ext cx="457200" cy="457200"/>
-          </a:xfrm>
-          <a:prstGeom prst="rect">
-            <a:avLst/>
-          </a:prstGeom>
-          <a:noFill/>
-          <a:ln/>
-        </p:spPr>
-        <p:txBody>
-          <a:bodyPr wrap="square" rtlCol="0" anchor="ctr"/>
-          <a:lstStyle/>
-          <a:p>
-            <a:pPr marL="0" indent="0" algn="ctr">
-              <a:buNone/>
-            </a:pPr>
-            <a:r>
-              <a:rPr lang="en-US" sz="1500" b="1" dirty="0">
-                <a:solidFill>
-                  <a:srgbClr val="FFFFFF"/>
-                </a:solidFill>
-                <a:latin typeface="Calibri" pitchFamily="34" charset="0"/>
-                <a:ea typeface="Calibri" pitchFamily="34" charset="-122"/>
-                <a:cs typeface="Calibri" pitchFamily="34" charset="-120"/>
-              </a:rPr>
-              <a:t>2</a:t>
-            </a:r>
-            <a:endParaRPr lang="en-US" sz="1500" dirty="0"/>
-          </a:p>
-        </p:txBody>
-      </p:sp>
-      <p:sp>
-        <p:nvSpPr>
-          <p:cNvPr id="9" name="Text 7"/>
-          <p:cNvSpPr/>
-          <p:nvPr/>
-        </p:nvSpPr>
-        <p:spPr>
-          <a:xfrm>
-            <a:off x="1188720" y="2350008"/>
-            <a:ext cx="10424160" cy="548640"/>
-          </a:xfrm>
-          <a:prstGeom prst="rect">
-            <a:avLst/>
-          </a:prstGeom>
-          <a:noFill/>
-          <a:ln/>
-        </p:spPr>
-        <p:txBody>
-          <a:bodyPr wrap="square" rtlCol="0" anchor="t"/>
-          <a:lstStyle/>
-          <a:p>
-            <a:pPr marL="0" indent="0">
-              <a:buNone/>
-            </a:pPr>
-            <a:r>
-              <a:rPr lang="en-US" sz="1400" dirty="0">
-                <a:solidFill>
-                  <a:srgbClr val="1B1F3B"/>
-                </a:solidFill>
-                <a:latin typeface="Calibri" pitchFamily="34" charset="0"/>
-                <a:ea typeface="Calibri" pitchFamily="34" charset="-122"/>
-                <a:cs typeface="Calibri" pitchFamily="34" charset="-120"/>
-              </a:rPr>
-              <a:t>Web API tasks (timers, fetch, events) never enter the call stack directly — their callbacks queue up instead.</a:t>
-            </a:r>
-            <a:endParaRPr lang="en-US" sz="1400" dirty="0"/>
-          </a:p>
-        </p:txBody>
-      </p:sp>
-      <p:sp>
-        <p:nvSpPr>
-          <p:cNvPr id="10" name="Shape 8"/>
-          <p:cNvSpPr/>
-          <p:nvPr/>
-        </p:nvSpPr>
-        <p:spPr>
-          <a:xfrm>
-            <a:off x="548640" y="3063240"/>
-            <a:ext cx="457200" cy="457200"/>
-          </a:xfrm>
-          <a:prstGeom prst="roundRect">
-            <a:avLst>
-              <a:gd name="adj" fmla="val 16000"/>
-            </a:avLst>
-          </a:prstGeom>
-          <a:solidFill>
-            <a:srgbClr val="1B1F3B"/>
-          </a:solidFill>
-          <a:ln/>
-        </p:spPr>
-      </p:sp>
-      <p:sp>
-        <p:nvSpPr>
-          <p:cNvPr id="11" name="Text 9"/>
-          <p:cNvSpPr/>
-          <p:nvPr/>
-        </p:nvSpPr>
-        <p:spPr>
-          <a:xfrm>
-            <a:off x="548640" y="3063240"/>
-            <a:ext cx="457200" cy="457200"/>
-          </a:xfrm>
-          <a:prstGeom prst="rect">
-            <a:avLst/>
-          </a:prstGeom>
-          <a:noFill/>
-          <a:ln/>
-        </p:spPr>
-        <p:txBody>
-          <a:bodyPr wrap="square" rtlCol="0" anchor="ctr"/>
-          <a:lstStyle/>
-          <a:p>
-            <a:pPr marL="0" indent="0" algn="ctr">
-              <a:buNone/>
-            </a:pPr>
-            <a:r>
-              <a:rPr lang="en-US" sz="1500" b="1" dirty="0">
-                <a:solidFill>
-                  <a:srgbClr val="FFFFFF"/>
-                </a:solidFill>
-                <a:latin typeface="Calibri" pitchFamily="34" charset="0"/>
-                <a:ea typeface="Calibri" pitchFamily="34" charset="-122"/>
-                <a:cs typeface="Calibri" pitchFamily="34" charset="-120"/>
-              </a:rPr>
-              <a:t>3</a:t>
-            </a:r>
-            <a:endParaRPr lang="en-US" sz="1500" dirty="0"/>
-          </a:p>
-        </p:txBody>
-      </p:sp>
-      <p:sp>
-        <p:nvSpPr>
-          <p:cNvPr id="12" name="Text 10"/>
-          <p:cNvSpPr/>
-          <p:nvPr/>
-        </p:nvSpPr>
-        <p:spPr>
-          <a:xfrm>
-            <a:off x="1188720" y="3035808"/>
-            <a:ext cx="10424160" cy="548640"/>
-          </a:xfrm>
-          <a:prstGeom prst="rect">
-            <a:avLst/>
-          </a:prstGeom>
-          <a:noFill/>
-          <a:ln/>
-        </p:spPr>
-        <p:txBody>
-          <a:bodyPr wrap="square" rtlCol="0" anchor="t"/>
-          <a:lstStyle/>
-          <a:p>
-            <a:pPr marL="0" indent="0">
-              <a:buNone/>
-            </a:pPr>
-            <a:r>
-              <a:rPr lang="en-US" sz="1400" dirty="0">
-                <a:solidFill>
-                  <a:srgbClr val="1B1F3B"/>
-                </a:solidFill>
-                <a:latin typeface="Calibri" pitchFamily="34" charset="0"/>
-                <a:ea typeface="Calibri" pitchFamily="34" charset="-122"/>
-                <a:cs typeface="Calibri" pitchFamily="34" charset="-120"/>
-              </a:rPr>
-              <a:t>setTimeout / event callbacks → Callback Queue (FIFO). Promise handlers → Job Queue (FIFO).</a:t>
-            </a:r>
-            <a:endParaRPr lang="en-US" sz="1400" dirty="0"/>
-          </a:p>
-        </p:txBody>
-      </p:sp>
-      <p:sp>
-        <p:nvSpPr>
-          <p:cNvPr id="13" name="Shape 11"/>
-          <p:cNvSpPr/>
-          <p:nvPr/>
-        </p:nvSpPr>
-        <p:spPr>
-          <a:xfrm>
-            <a:off x="548640" y="3749040"/>
-            <a:ext cx="457200" cy="457200"/>
-          </a:xfrm>
-          <a:prstGeom prst="roundRect">
-            <a:avLst>
-              <a:gd name="adj" fmla="val 16000"/>
-            </a:avLst>
-          </a:prstGeom>
-          <a:solidFill>
-            <a:srgbClr val="1B1F3B"/>
-          </a:solidFill>
-          <a:ln/>
-        </p:spPr>
-      </p:sp>
-      <p:sp>
-        <p:nvSpPr>
-          <p:cNvPr id="14" name="Text 12"/>
-          <p:cNvSpPr/>
-          <p:nvPr/>
-        </p:nvSpPr>
-        <p:spPr>
-          <a:xfrm>
-            <a:off x="548640" y="3749040"/>
-            <a:ext cx="457200" cy="457200"/>
-          </a:xfrm>
-          <a:prstGeom prst="rect">
-            <a:avLst/>
-          </a:prstGeom>
-          <a:noFill/>
-          <a:ln/>
-        </p:spPr>
-        <p:txBody>
-          <a:bodyPr wrap="square" rtlCol="0" anchor="ctr"/>
-          <a:lstStyle/>
-          <a:p>
-            <a:pPr marL="0" indent="0" algn="ctr">
-              <a:buNone/>
-            </a:pPr>
-            <a:r>
-              <a:rPr lang="en-US" sz="1500" b="1" dirty="0">
-                <a:solidFill>
-                  <a:srgbClr val="FFFFFF"/>
-                </a:solidFill>
-                <a:latin typeface="Calibri" pitchFamily="34" charset="0"/>
-                <a:ea typeface="Calibri" pitchFamily="34" charset="-122"/>
-                <a:cs typeface="Calibri" pitchFamily="34" charset="-120"/>
-              </a:rPr>
-              <a:t>4</a:t>
-            </a:r>
-            <a:endParaRPr lang="en-US" sz="1500" dirty="0"/>
-          </a:p>
-        </p:txBody>
-      </p:sp>
-      <p:sp>
-        <p:nvSpPr>
-          <p:cNvPr id="15" name="Text 13"/>
-          <p:cNvSpPr/>
-          <p:nvPr/>
-        </p:nvSpPr>
-        <p:spPr>
-          <a:xfrm>
-            <a:off x="1188720" y="3721608"/>
-            <a:ext cx="10424160" cy="548640"/>
-          </a:xfrm>
-          <a:prstGeom prst="rect">
-            <a:avLst/>
-          </a:prstGeom>
-          <a:noFill/>
-          <a:ln/>
-        </p:spPr>
-        <p:txBody>
-          <a:bodyPr wrap="square" rtlCol="0" anchor="t"/>
-          <a:lstStyle/>
-          <a:p>
-            <a:pPr marL="0" indent="0">
-              <a:buNone/>
-            </a:pPr>
-            <a:r>
-              <a:rPr lang="en-US" sz="1400" dirty="0">
-                <a:solidFill>
-                  <a:srgbClr val="1B1F3B"/>
-                </a:solidFill>
-                <a:latin typeface="Calibri" pitchFamily="34" charset="0"/>
-                <a:ea typeface="Calibri" pitchFamily="34" charset="-122"/>
-                <a:cs typeface="Calibri" pitchFamily="34" charset="-120"/>
-              </a:rPr>
-              <a:t>The Event Loop acts only when the call stack is empty.</a:t>
-            </a:r>
-            <a:endParaRPr lang="en-US" sz="1400" dirty="0"/>
-          </a:p>
-        </p:txBody>
-      </p:sp>
-      <p:sp>
-        <p:nvSpPr>
-          <p:cNvPr id="16" name="Shape 14"/>
-          <p:cNvSpPr/>
-          <p:nvPr/>
-        </p:nvSpPr>
-        <p:spPr>
-          <a:xfrm>
-            <a:off x="548640" y="4434840"/>
-            <a:ext cx="457200" cy="457200"/>
-          </a:xfrm>
-          <a:prstGeom prst="roundRect">
-            <a:avLst>
-              <a:gd name="adj" fmla="val 16000"/>
-            </a:avLst>
-          </a:prstGeom>
-          <a:solidFill>
-            <a:srgbClr val="F0DB4F"/>
-          </a:solidFill>
-          <a:ln/>
-        </p:spPr>
-      </p:sp>
-      <p:sp>
-        <p:nvSpPr>
-          <p:cNvPr id="17" name="Text 15"/>
-          <p:cNvSpPr/>
-          <p:nvPr/>
-        </p:nvSpPr>
-        <p:spPr>
-          <a:xfrm>
-            <a:off x="548640" y="4434840"/>
-            <a:ext cx="457200" cy="457200"/>
-          </a:xfrm>
-          <a:prstGeom prst="rect">
-            <a:avLst/>
-          </a:prstGeom>
-          <a:noFill/>
-          <a:ln/>
-        </p:spPr>
-        <p:txBody>
-          <a:bodyPr wrap="square" rtlCol="0" anchor="ctr"/>
-          <a:lstStyle/>
-          <a:p>
-            <a:pPr marL="0" indent="0" algn="ctr">
-              <a:buNone/>
-            </a:pPr>
-            <a:r>
-              <a:rPr lang="en-US" sz="1500" b="1" dirty="0">
-                <a:solidFill>
-                  <a:srgbClr val="1B1F3B"/>
-                </a:solidFill>
-                <a:latin typeface="Calibri" pitchFamily="34" charset="0"/>
-                <a:ea typeface="Calibri" pitchFamily="34" charset="-122"/>
-                <a:cs typeface="Calibri" pitchFamily="34" charset="-120"/>
-              </a:rPr>
-              <a:t>5</a:t>
-            </a:r>
-            <a:endParaRPr lang="en-US" sz="1500" dirty="0"/>
-          </a:p>
-        </p:txBody>
-      </p:sp>
-      <p:sp>
-        <p:nvSpPr>
-          <p:cNvPr id="18" name="Text 16"/>
-          <p:cNvSpPr/>
-          <p:nvPr/>
-        </p:nvSpPr>
-        <p:spPr>
-          <a:xfrm>
-            <a:off x="1188720" y="4407408"/>
-            <a:ext cx="10424160" cy="548640"/>
-          </a:xfrm>
-          <a:prstGeom prst="rect">
-            <a:avLst/>
-          </a:prstGeom>
-          <a:noFill/>
-          <a:ln/>
-        </p:spPr>
-        <p:txBody>
-          <a:bodyPr wrap="square" rtlCol="0" anchor="t"/>
-          <a:lstStyle/>
-          <a:p>
-            <a:pPr marL="0" indent="0">
-              <a:buNone/>
-            </a:pPr>
-            <a:r>
-              <a:rPr lang="en-US" sz="1400" dirty="0">
-                <a:solidFill>
-                  <a:srgbClr val="1B1F3B"/>
-                </a:solidFill>
-                <a:latin typeface="Calibri" pitchFamily="34" charset="0"/>
-                <a:ea typeface="Calibri" pitchFamily="34" charset="-122"/>
-                <a:cs typeface="Calibri" pitchFamily="34" charset="-120"/>
-              </a:rPr>
-              <a:t>If both queues have items: the Job Queue always goes first.</a:t>
-            </a:r>
-            <a:endParaRPr lang="en-US" sz="1400" dirty="0"/>
-          </a:p>
-        </p:txBody>
-      </p:sp>
-      <p:sp>
-        <p:nvSpPr>
-          <p:cNvPr id="19" name="Shape 17"/>
-          <p:cNvSpPr/>
-          <p:nvPr/>
-        </p:nvSpPr>
-        <p:spPr>
-          <a:xfrm>
-            <a:off x="548640" y="5120640"/>
-            <a:ext cx="457200" cy="457200"/>
-          </a:xfrm>
-          <a:prstGeom prst="roundRect">
-            <a:avLst>
-              <a:gd name="adj" fmla="val 16000"/>
-            </a:avLst>
-          </a:prstGeom>
-          <a:solidFill>
-            <a:srgbClr val="F0DB4F"/>
-          </a:solidFill>
-          <a:ln/>
-        </p:spPr>
-      </p:sp>
-      <p:sp>
-        <p:nvSpPr>
-          <p:cNvPr id="20" name="Text 18"/>
-          <p:cNvSpPr/>
-          <p:nvPr/>
-        </p:nvSpPr>
-        <p:spPr>
-          <a:xfrm>
-            <a:off x="548640" y="5120640"/>
-            <a:ext cx="457200" cy="457200"/>
-          </a:xfrm>
-          <a:prstGeom prst="rect">
-            <a:avLst/>
-          </a:prstGeom>
-          <a:noFill/>
-          <a:ln/>
-        </p:spPr>
-        <p:txBody>
-          <a:bodyPr wrap="square" rtlCol="0" anchor="ctr"/>
-          <a:lstStyle/>
-          <a:p>
-            <a:pPr marL="0" indent="0" algn="ctr">
-              <a:buNone/>
-            </a:pPr>
-            <a:r>
-              <a:rPr lang="en-US" sz="1500" b="1" dirty="0">
-                <a:solidFill>
-                  <a:srgbClr val="1B1F3B"/>
-                </a:solidFill>
-                <a:latin typeface="Calibri" pitchFamily="34" charset="0"/>
-                <a:ea typeface="Calibri" pitchFamily="34" charset="-122"/>
-                <a:cs typeface="Calibri" pitchFamily="34" charset="-120"/>
-              </a:rPr>
-              <a:t>6</a:t>
-            </a:r>
-            <a:endParaRPr lang="en-US" sz="1500" dirty="0"/>
-          </a:p>
-        </p:txBody>
-      </p:sp>
-      <p:sp>
-        <p:nvSpPr>
-          <p:cNvPr id="21" name="Text 19"/>
-          <p:cNvSpPr/>
-          <p:nvPr/>
-        </p:nvSpPr>
-        <p:spPr>
-          <a:xfrm>
-            <a:off x="1188720" y="5093208"/>
-            <a:ext cx="10424160" cy="548640"/>
-          </a:xfrm>
-          <a:prstGeom prst="rect">
-            <a:avLst/>
-          </a:prstGeom>
-          <a:noFill/>
-          <a:ln/>
-        </p:spPr>
-        <p:txBody>
-          <a:bodyPr wrap="square" rtlCol="0" anchor="t"/>
-          <a:lstStyle/>
-          <a:p>
-            <a:pPr marL="0" indent="0">
-              <a:buNone/>
-            </a:pPr>
-            <a:r>
-              <a:rPr lang="en-US" sz="1400" dirty="0">
-                <a:solidFill>
-                  <a:srgbClr val="1B1F3B"/>
-                </a:solidFill>
-                <a:latin typeface="Calibri" pitchFamily="34" charset="0"/>
-                <a:ea typeface="Calibri" pitchFamily="34" charset="-122"/>
-                <a:cs typeface="Calibri" pitchFamily="34" charset="-120"/>
-              </a:rPr>
-              <a:t>If the Job Queue has multiple items, ALL of them run before the Event Loop touches the Callback Queue again.</a:t>
-            </a:r>
-            <a:endParaRPr lang="en-US" sz="1400" dirty="0"/>
-          </a:p>
-        </p:txBody>
-      </p:sp>
-    </p:spTree>
-  </p:cSld>
-  <p:clrMapOvr>
-    <a:masterClrMapping/>
-  </p:clrMapOvr>
-</p:sld>
-</file>
-
-<file path=ppt/slides/slide9.xml><?xml version="1.0" encoding="utf-8"?>
-<p:sld xmlns:a="http://schemas.openxmlformats.org/drawingml/2006/main" xmlns:r="http://schemas.openxmlformats.org/officeDocument/2006/relationships" xmlns:p="http://schemas.openxmlformats.org/presentationml/2006/main">
-  <p:cSld name="Slide 10">
-    <p:bg>
-      <p:bgPr>
-        <a:solidFill>
-          <a:srgbClr val="F7F7F5"/>
-        </a:solidFill>
-        <a:effectLst/>
-      </p:bgPr>
-    </p:bg>
-    <p:spTree>
-      <p:nvGrpSpPr>
-        <p:cNvPr id="1" name=""/>
-        <p:cNvGrpSpPr/>
-        <p:nvPr/>
-      </p:nvGrpSpPr>
-      <p:grpSpPr>
-        <a:xfrm>
-          <a:off x="0" y="0"/>
-          <a:ext cx="0" cy="0"/>
-          <a:chOff x="0" y="0"/>
-          <a:chExt cx="0" cy="0"/>
-        </a:xfrm>
-      </p:grpSpPr>
-      <p:sp>
-        <p:nvSpPr>
-          <p:cNvPr id="2" name="Text 0"/>
-          <p:cNvSpPr/>
-          <p:nvPr/>
-        </p:nvSpPr>
-        <p:spPr>
-          <a:xfrm>
-            <a:off x="548640" y="365760"/>
-            <a:ext cx="7315200" cy="365760"/>
-          </a:xfrm>
-          <a:prstGeom prst="rect">
-            <a:avLst/>
-          </a:prstGeom>
-          <a:noFill/>
-          <a:ln/>
-        </p:spPr>
-        <p:txBody>
-          <a:bodyPr wrap="square" rtlCol="0" anchor="ctr"/>
-          <a:lstStyle/>
-          <a:p>
-            <a:pPr marL="0" indent="0">
-              <a:buNone/>
-            </a:pPr>
-            <a:r>
-              <a:rPr lang="en-US" sz="1200" b="1" kern="0" spc="200" dirty="0">
-                <a:solidFill>
-                  <a:srgbClr val="2EC4B6"/>
-                </a:solidFill>
-                <a:latin typeface="Calibri" pitchFamily="34" charset="0"/>
-                <a:ea typeface="Calibri" pitchFamily="34" charset="-122"/>
-                <a:cs typeface="Calibri" pitchFamily="34" charset="-120"/>
-              </a:rPr>
-              <a:t>WORKED EXAMPLE 2</a:t>
-            </a:r>
-            <a:endParaRPr lang="en-US" sz="1200" dirty="0"/>
-          </a:p>
-        </p:txBody>
-      </p:sp>
-      <p:sp>
-        <p:nvSpPr>
-          <p:cNvPr id="3" name="Text 1"/>
-          <p:cNvSpPr/>
-          <p:nvPr/>
-        </p:nvSpPr>
-        <p:spPr>
-          <a:xfrm>
-            <a:off x="548640" y="685800"/>
-            <a:ext cx="10515600" cy="822960"/>
-          </a:xfrm>
-          <a:prstGeom prst="rect">
-            <a:avLst/>
-          </a:prstGeom>
-          <a:noFill/>
-          <a:ln/>
-        </p:spPr>
-        <p:txBody>
-          <a:bodyPr wrap="square" rtlCol="0" anchor="ctr"/>
-          <a:lstStyle/>
-          <a:p>
-            <a:pPr marL="0" indent="0">
-              <a:buNone/>
-            </a:pPr>
-            <a:r>
-              <a:rPr lang="en-US" sz="3000" b="1" dirty="0">
-                <a:solidFill>
-                  <a:srgbClr val="1B1F3B"/>
-                </a:solidFill>
-                <a:latin typeface="Bookman Old Style" pitchFamily="34" charset="0"/>
-                <a:ea typeface="Bookman Old Style" pitchFamily="34" charset="-122"/>
-                <a:cs typeface="Bookman Old Style" pitchFamily="34" charset="-120"/>
-              </a:rPr>
-              <a:t>Timers + Promises Together</a:t>
-            </a:r>
-            <a:endParaRPr lang="en-US" sz="3000" dirty="0"/>
-          </a:p>
-        </p:txBody>
-      </p:sp>
-      <p:sp>
-        <p:nvSpPr>
-          <p:cNvPr id="4" name="Shape 2"/>
-          <p:cNvSpPr/>
-          <p:nvPr/>
-        </p:nvSpPr>
-        <p:spPr>
-          <a:xfrm>
-            <a:off x="548640" y="1691640"/>
-            <a:ext cx="5120640" cy="4297680"/>
-          </a:xfrm>
-          <a:prstGeom prst="roundRect">
-            <a:avLst>
-              <a:gd name="adj" fmla="val 2128"/>
-            </a:avLst>
-          </a:prstGeom>
-          <a:solidFill>
-            <a:srgbClr val="1B1F3B"/>
-          </a:solidFill>
-          <a:ln/>
-        </p:spPr>
-      </p:sp>
-      <p:sp>
-        <p:nvSpPr>
-          <p:cNvPr id="5" name="Text 3"/>
-          <p:cNvSpPr/>
-          <p:nvPr/>
-        </p:nvSpPr>
-        <p:spPr>
-          <a:xfrm>
-            <a:off x="777240" y="1874520"/>
-            <a:ext cx="4663440" cy="3931920"/>
-          </a:xfrm>
-          <a:prstGeom prst="rect">
-            <a:avLst/>
-          </a:prstGeom>
-          <a:noFill/>
-          <a:ln/>
-        </p:spPr>
-        <p:txBody>
-          <a:bodyPr wrap="square" rtlCol="0" anchor="t"/>
-          <a:lstStyle/>
-          <a:p>
-            <a:pPr marL="0" indent="0">
-              <a:buNone/>
-            </a:pPr>
-            <a:r>
-              <a:rPr lang="en-US" sz="1250" dirty="0">
-                <a:solidFill>
-                  <a:srgbClr val="E9F5F4"/>
-                </a:solidFill>
-                <a:latin typeface="Courier New" pitchFamily="34" charset="0"/>
-                <a:ea typeface="Courier New" pitchFamily="34" charset="-122"/>
-                <a:cs typeface="Courier New" pitchFamily="34" charset="-120"/>
-              </a:rPr>
-              <a:t>function f1() { console.log("f1"); }</a:t>
-            </a:r>
-            <a:endParaRPr lang="en-US" sz="1250" dirty="0"/>
-          </a:p>
-          <a:p>
-            <a:pPr marL="0" indent="0">
-              <a:buNone/>
-            </a:pPr>
-            <a:r>
-              <a:rPr lang="en-US" sz="1250" dirty="0">
-                <a:solidFill>
-                  <a:srgbClr val="E9F5F4"/>
-                </a:solidFill>
-                <a:latin typeface="Courier New" pitchFamily="34" charset="0"/>
-                <a:ea typeface="Courier New" pitchFamily="34" charset="-122"/>
-                <a:cs typeface="Courier New" pitchFamily="34" charset="-120"/>
-              </a:rPr>
-              <a:t>function f2() { console.log("f2"); }</a:t>
-            </a:r>
-            <a:endParaRPr lang="en-US" sz="1250" dirty="0"/>
-          </a:p>
-          <a:p>
-            <a:pPr marL="0" indent="0">
-              <a:buNone/>
-            </a:pPr>
-            <a:endParaRPr lang="en-US" sz="1250" dirty="0"/>
-          </a:p>
-          <a:p>
-            <a:pPr marL="0" indent="0">
-              <a:buNone/>
-            </a:pPr>
-            <a:r>
-              <a:rPr lang="en-US" sz="1250" dirty="0">
-                <a:solidFill>
-                  <a:srgbClr val="E9F5F4"/>
-                </a:solidFill>
-                <a:latin typeface="Courier New" pitchFamily="34" charset="0"/>
-                <a:ea typeface="Courier New" pitchFamily="34" charset="-122"/>
-                <a:cs typeface="Courier New" pitchFamily="34" charset="-120"/>
-              </a:rPr>
-              <a:t>function main() {</a:t>
-            </a:r>
-            <a:endParaRPr lang="en-US" sz="1250" dirty="0"/>
-          </a:p>
-          <a:p>
-            <a:pPr marL="0" indent="0">
-              <a:buNone/>
-            </a:pPr>
-            <a:r>
-              <a:rPr lang="en-US" sz="1250" dirty="0">
-                <a:solidFill>
-                  <a:srgbClr val="E9F5F4"/>
-                </a:solidFill>
-                <a:latin typeface="Courier New" pitchFamily="34" charset="0"/>
-                <a:ea typeface="Courier New" pitchFamily="34" charset="-122"/>
-                <a:cs typeface="Courier New" pitchFamily="34" charset="-120"/>
-              </a:rPr>
-              <a:t>  console.log("main");</a:t>
-            </a:r>
-            <a:endParaRPr lang="en-US" sz="1250" dirty="0"/>
-          </a:p>
-          <a:p>
-            <a:pPr marL="0" indent="0">
-              <a:buNone/>
-            </a:pPr>
-            <a:r>
-              <a:rPr lang="en-US" sz="1250" dirty="0">
-                <a:solidFill>
-                  <a:srgbClr val="E9F5F4"/>
-                </a:solidFill>
-                <a:latin typeface="Courier New" pitchFamily="34" charset="0"/>
-                <a:ea typeface="Courier New" pitchFamily="34" charset="-122"/>
-                <a:cs typeface="Courier New" pitchFamily="34" charset="-120"/>
-              </a:rPr>
-              <a:t>  setTimeout(f1, 0);</a:t>
-            </a:r>
-            <a:endParaRPr lang="en-US" sz="1250" dirty="0"/>
-          </a:p>
-          <a:p>
-            <a:pPr marL="0" indent="0">
-              <a:buNone/>
-            </a:pPr>
-            <a:r>
-              <a:rPr lang="en-US" sz="1250" dirty="0">
-                <a:solidFill>
-                  <a:srgbClr val="E9F5F4"/>
-                </a:solidFill>
-                <a:latin typeface="Courier New" pitchFamily="34" charset="0"/>
-                <a:ea typeface="Courier New" pitchFamily="34" charset="-122"/>
-                <a:cs typeface="Courier New" pitchFamily="34" charset="-120"/>
-              </a:rPr>
-              <a:t>  Promise.resolve("I am a promise")</a:t>
-            </a:r>
-            <a:endParaRPr lang="en-US" sz="1250" dirty="0"/>
-          </a:p>
-          <a:p>
-            <a:pPr marL="0" indent="0">
-              <a:buNone/>
-            </a:pPr>
-            <a:r>
-              <a:rPr lang="en-US" sz="1250" dirty="0">
-                <a:solidFill>
-                  <a:srgbClr val="E9F5F4"/>
-                </a:solidFill>
-                <a:latin typeface="Courier New" pitchFamily="34" charset="0"/>
-                <a:ea typeface="Courier New" pitchFamily="34" charset="-122"/>
-                <a:cs typeface="Courier New" pitchFamily="34" charset="-120"/>
-              </a:rPr>
-              <a:t>    .then(msg =&gt; console.log(msg));</a:t>
-            </a:r>
-            <a:endParaRPr lang="en-US" sz="1250" dirty="0"/>
-          </a:p>
-          <a:p>
-            <a:pPr marL="0" indent="0">
-              <a:buNone/>
-            </a:pPr>
-            <a:r>
-              <a:rPr lang="en-US" sz="1250" dirty="0">
-                <a:solidFill>
-                  <a:srgbClr val="E9F5F4"/>
-                </a:solidFill>
-                <a:latin typeface="Courier New" pitchFamily="34" charset="0"/>
-                <a:ea typeface="Courier New" pitchFamily="34" charset="-122"/>
-                <a:cs typeface="Courier New" pitchFamily="34" charset="-120"/>
-              </a:rPr>
-              <a:t>  f2();</a:t>
-            </a:r>
-            <a:endParaRPr lang="en-US" sz="1250" dirty="0"/>
-          </a:p>
-          <a:p>
-            <a:pPr marL="0" indent="0">
-              <a:buNone/>
-            </a:pPr>
-            <a:r>
-              <a:rPr lang="en-US" sz="1250" dirty="0">
-                <a:solidFill>
-                  <a:srgbClr val="E9F5F4"/>
-                </a:solidFill>
-                <a:latin typeface="Courier New" pitchFamily="34" charset="0"/>
-                <a:ea typeface="Courier New" pitchFamily="34" charset="-122"/>
-                <a:cs typeface="Courier New" pitchFamily="34" charset="-120"/>
-              </a:rPr>
-              <a:t>}</a:t>
-            </a:r>
-            <a:endParaRPr lang="en-US" sz="1250" dirty="0"/>
-          </a:p>
-          <a:p>
-            <a:pPr marL="0" indent="0">
-              <a:buNone/>
-            </a:pPr>
-            <a:r>
-              <a:rPr lang="en-US" sz="1250" dirty="0">
-                <a:solidFill>
-                  <a:srgbClr val="E9F5F4"/>
-                </a:solidFill>
-                <a:latin typeface="Courier New" pitchFamily="34" charset="0"/>
-                <a:ea typeface="Courier New" pitchFamily="34" charset="-122"/>
-                <a:cs typeface="Courier New" pitchFamily="34" charset="-120"/>
-              </a:rPr>
-              <a:t>main();</a:t>
-            </a:r>
-            <a:endParaRPr lang="en-US" sz="1250" dirty="0"/>
-          </a:p>
-        </p:txBody>
-      </p:sp>
-      <p:sp>
-        <p:nvSpPr>
-          <p:cNvPr id="6" name="Shape 4"/>
-          <p:cNvSpPr/>
-          <p:nvPr/>
-        </p:nvSpPr>
-        <p:spPr>
-          <a:xfrm>
-            <a:off x="5989320" y="1856232"/>
-            <a:ext cx="292608" cy="292608"/>
-          </a:xfrm>
-          <a:prstGeom prst="ellipse">
-            <a:avLst/>
-          </a:prstGeom>
-          <a:solidFill>
-            <a:srgbClr val="2EC4B6"/>
-          </a:solidFill>
-          <a:ln/>
-        </p:spPr>
-      </p:sp>
-      <p:sp>
-        <p:nvSpPr>
-          <p:cNvPr id="7" name="Text 5"/>
-          <p:cNvSpPr/>
-          <p:nvPr/>
-        </p:nvSpPr>
-        <p:spPr>
-          <a:xfrm>
-            <a:off x="5989320" y="1856232"/>
-            <a:ext cx="292608" cy="292608"/>
-          </a:xfrm>
-          <a:prstGeom prst="rect">
-            <a:avLst/>
-          </a:prstGeom>
-          <a:noFill/>
-          <a:ln/>
-        </p:spPr>
-        <p:txBody>
-          <a:bodyPr wrap="square" rtlCol="0" anchor="ctr"/>
-          <a:lstStyle/>
-          <a:p>
-            <a:pPr marL="0" indent="0" algn="ctr">
-              <a:buNone/>
-            </a:pPr>
-            <a:r>
-              <a:rPr lang="en-US" sz="1200" b="1" dirty="0">
-                <a:solidFill>
-                  <a:srgbClr val="1B1F3B"/>
-                </a:solidFill>
-                <a:latin typeface="Calibri" pitchFamily="34" charset="0"/>
-                <a:ea typeface="Calibri" pitchFamily="34" charset="-122"/>
-                <a:cs typeface="Calibri" pitchFamily="34" charset="-120"/>
-              </a:rPr>
-              <a:t>1</a:t>
-            </a:r>
-            <a:endParaRPr lang="en-US" sz="1200" dirty="0"/>
-          </a:p>
-        </p:txBody>
-      </p:sp>
-      <p:sp>
-        <p:nvSpPr>
-          <p:cNvPr id="8" name="Text 6"/>
-          <p:cNvSpPr/>
-          <p:nvPr/>
-        </p:nvSpPr>
-        <p:spPr>
-          <a:xfrm>
-            <a:off x="6446520" y="1773936"/>
-            <a:ext cx="5120640" cy="548640"/>
-          </a:xfrm>
-          <a:prstGeom prst="rect">
-            <a:avLst/>
-          </a:prstGeom>
-          <a:noFill/>
-          <a:ln/>
-        </p:spPr>
-        <p:txBody>
-          <a:bodyPr wrap="square" rtlCol="0" anchor="t"/>
-          <a:lstStyle/>
-          <a:p>
-            <a:pPr marL="0" indent="0">
-              <a:buNone/>
-            </a:pPr>
-            <a:r>
-              <a:rPr lang="en-US" sz="1250" dirty="0">
-                <a:solidFill>
-                  <a:srgbClr val="1B1F3B"/>
-                </a:solidFill>
-                <a:latin typeface="Calibri" pitchFamily="34" charset="0"/>
-                <a:ea typeface="Calibri" pitchFamily="34" charset="-122"/>
-                <a:cs typeface="Calibri" pitchFamily="34" charset="-120"/>
-              </a:rPr>
-              <a:t>main() logs "main" (sync)</a:t>
-            </a:r>
-            <a:endParaRPr lang="en-US" sz="1250" dirty="0"/>
-          </a:p>
-        </p:txBody>
-      </p:sp>
-      <p:sp>
-        <p:nvSpPr>
-          <p:cNvPr id="9" name="Shape 7"/>
-          <p:cNvSpPr/>
-          <p:nvPr/>
-        </p:nvSpPr>
-        <p:spPr>
-          <a:xfrm>
-            <a:off x="5989320" y="2459736"/>
-            <a:ext cx="292608" cy="292608"/>
-          </a:xfrm>
-          <a:prstGeom prst="ellipse">
-            <a:avLst/>
-          </a:prstGeom>
-          <a:solidFill>
-            <a:srgbClr val="2EC4B6"/>
-          </a:solidFill>
-          <a:ln/>
-        </p:spPr>
-      </p:sp>
-      <p:sp>
-        <p:nvSpPr>
-          <p:cNvPr id="10" name="Text 8"/>
-          <p:cNvSpPr/>
-          <p:nvPr/>
-        </p:nvSpPr>
-        <p:spPr>
-          <a:xfrm>
-            <a:off x="5989320" y="2459736"/>
-            <a:ext cx="292608" cy="292608"/>
-          </a:xfrm>
-          <a:prstGeom prst="rect">
-            <a:avLst/>
-          </a:prstGeom>
-          <a:noFill/>
-          <a:ln/>
-        </p:spPr>
-        <p:txBody>
-          <a:bodyPr wrap="square" rtlCol="0" anchor="ctr"/>
-          <a:lstStyle/>
-          <a:p>
-            <a:pPr marL="0" indent="0" algn="ctr">
-              <a:buNone/>
-            </a:pPr>
-            <a:r>
-              <a:rPr lang="en-US" sz="1200" b="1" dirty="0">
-                <a:solidFill>
-                  <a:srgbClr val="1B1F3B"/>
-                </a:solidFill>
-                <a:latin typeface="Calibri" pitchFamily="34" charset="0"/>
-                <a:ea typeface="Calibri" pitchFamily="34" charset="-122"/>
-                <a:cs typeface="Calibri" pitchFamily="34" charset="-120"/>
-              </a:rPr>
-              <a:t>2</a:t>
-            </a:r>
-            <a:endParaRPr lang="en-US" sz="1200" dirty="0"/>
-          </a:p>
-        </p:txBody>
-      </p:sp>
-      <p:sp>
-        <p:nvSpPr>
-          <p:cNvPr id="11" name="Text 9"/>
-          <p:cNvSpPr/>
-          <p:nvPr/>
-        </p:nvSpPr>
-        <p:spPr>
-          <a:xfrm>
-            <a:off x="6446520" y="2377440"/>
-            <a:ext cx="5120640" cy="548640"/>
-          </a:xfrm>
-          <a:prstGeom prst="rect">
-            <a:avLst/>
-          </a:prstGeom>
-          <a:noFill/>
-          <a:ln/>
-        </p:spPr>
-        <p:txBody>
-          <a:bodyPr wrap="square" rtlCol="0" anchor="t"/>
-          <a:lstStyle/>
-          <a:p>
-            <a:pPr marL="0" indent="0">
-              <a:buNone/>
-            </a:pPr>
-            <a:r>
-              <a:rPr lang="en-US" sz="1250" dirty="0">
-                <a:solidFill>
-                  <a:srgbClr val="1B1F3B"/>
-                </a:solidFill>
-                <a:latin typeface="Calibri" pitchFamily="34" charset="0"/>
-                <a:ea typeface="Calibri" pitchFamily="34" charset="-122"/>
-                <a:cs typeface="Calibri" pitchFamily="34" charset="-120"/>
-              </a:rPr>
-              <a:t>setTimeout(f1, 0) → f1 → Callback Queue</a:t>
-            </a:r>
-            <a:endParaRPr lang="en-US" sz="1250" dirty="0"/>
-          </a:p>
-        </p:txBody>
-      </p:sp>
-      <p:sp>
-        <p:nvSpPr>
-          <p:cNvPr id="12" name="Shape 10"/>
-          <p:cNvSpPr/>
-          <p:nvPr/>
-        </p:nvSpPr>
-        <p:spPr>
-          <a:xfrm>
-            <a:off x="5989320" y="3063240"/>
-            <a:ext cx="292608" cy="292608"/>
-          </a:xfrm>
-          <a:prstGeom prst="ellipse">
-            <a:avLst/>
-          </a:prstGeom>
-          <a:solidFill>
-            <a:srgbClr val="2EC4B6"/>
-          </a:solidFill>
-          <a:ln/>
-        </p:spPr>
-      </p:sp>
-      <p:sp>
-        <p:nvSpPr>
-          <p:cNvPr id="13" name="Text 11"/>
-          <p:cNvSpPr/>
-          <p:nvPr/>
-        </p:nvSpPr>
-        <p:spPr>
-          <a:xfrm>
-            <a:off x="5989320" y="3063240"/>
-            <a:ext cx="292608" cy="292608"/>
-          </a:xfrm>
-          <a:prstGeom prst="rect">
-            <a:avLst/>
-          </a:prstGeom>
-          <a:noFill/>
-          <a:ln/>
-        </p:spPr>
-        <p:txBody>
-          <a:bodyPr wrap="square" rtlCol="0" anchor="ctr"/>
-          <a:lstStyle/>
-          <a:p>
-            <a:pPr marL="0" indent="0" algn="ctr">
-              <a:buNone/>
-            </a:pPr>
-            <a:r>
-              <a:rPr lang="en-US" sz="1200" b="1" dirty="0">
-                <a:solidFill>
-                  <a:srgbClr val="1B1F3B"/>
-                </a:solidFill>
-                <a:latin typeface="Calibri" pitchFamily="34" charset="0"/>
-                <a:ea typeface="Calibri" pitchFamily="34" charset="-122"/>
-                <a:cs typeface="Calibri" pitchFamily="34" charset="-120"/>
-              </a:rPr>
-              <a:t>3</a:t>
-            </a:r>
-            <a:endParaRPr lang="en-US" sz="1200" dirty="0"/>
-          </a:p>
-        </p:txBody>
-      </p:sp>
-      <p:sp>
-        <p:nvSpPr>
-          <p:cNvPr id="14" name="Text 12"/>
-          <p:cNvSpPr/>
-          <p:nvPr/>
-        </p:nvSpPr>
-        <p:spPr>
-          <a:xfrm>
-            <a:off x="6446520" y="2980944"/>
-            <a:ext cx="5120640" cy="548640"/>
-          </a:xfrm>
-          <a:prstGeom prst="rect">
-            <a:avLst/>
-          </a:prstGeom>
-          <a:noFill/>
-          <a:ln/>
-        </p:spPr>
-        <p:txBody>
-          <a:bodyPr wrap="square" rtlCol="0" anchor="t"/>
-          <a:lstStyle/>
-          <a:p>
-            <a:pPr marL="0" indent="0">
-              <a:buNone/>
-            </a:pPr>
-            <a:r>
-              <a:rPr lang="en-US" sz="1250" dirty="0">
-                <a:solidFill>
-                  <a:srgbClr val="1B1F3B"/>
-                </a:solidFill>
-                <a:latin typeface="Calibri" pitchFamily="34" charset="0"/>
-                <a:ea typeface="Calibri" pitchFamily="34" charset="-122"/>
-                <a:cs typeface="Calibri" pitchFamily="34" charset="-120"/>
-              </a:rPr>
-              <a:t>Promise resolves → .then handler → Job Queue</a:t>
-            </a:r>
-            <a:endParaRPr lang="en-US" sz="1250" dirty="0"/>
-          </a:p>
-        </p:txBody>
-      </p:sp>
-      <p:sp>
-        <p:nvSpPr>
-          <p:cNvPr id="15" name="Shape 13"/>
-          <p:cNvSpPr/>
-          <p:nvPr/>
-        </p:nvSpPr>
-        <p:spPr>
-          <a:xfrm>
-            <a:off x="5989320" y="3666744"/>
-            <a:ext cx="292608" cy="292608"/>
-          </a:xfrm>
-          <a:prstGeom prst="ellipse">
-            <a:avLst/>
-          </a:prstGeom>
-          <a:solidFill>
-            <a:srgbClr val="2EC4B6"/>
-          </a:solidFill>
-          <a:ln/>
-        </p:spPr>
-      </p:sp>
-      <p:sp>
-        <p:nvSpPr>
-          <p:cNvPr id="16" name="Text 14"/>
-          <p:cNvSpPr/>
-          <p:nvPr/>
-        </p:nvSpPr>
-        <p:spPr>
-          <a:xfrm>
-            <a:off x="5989320" y="3666744"/>
-            <a:ext cx="292608" cy="292608"/>
-          </a:xfrm>
-          <a:prstGeom prst="rect">
-            <a:avLst/>
-          </a:prstGeom>
-          <a:noFill/>
-          <a:ln/>
-        </p:spPr>
-        <p:txBody>
-          <a:bodyPr wrap="square" rtlCol="0" anchor="ctr"/>
-          <a:lstStyle/>
-          <a:p>
-            <a:pPr marL="0" indent="0" algn="ctr">
-              <a:buNone/>
-            </a:pPr>
-            <a:r>
-              <a:rPr lang="en-US" sz="1200" b="1" dirty="0">
-                <a:solidFill>
-                  <a:srgbClr val="1B1F3B"/>
-                </a:solidFill>
-                <a:latin typeface="Calibri" pitchFamily="34" charset="0"/>
-                <a:ea typeface="Calibri" pitchFamily="34" charset="-122"/>
-                <a:cs typeface="Calibri" pitchFamily="34" charset="-120"/>
-              </a:rPr>
-              <a:t>4</a:t>
-            </a:r>
-            <a:endParaRPr lang="en-US" sz="1200" dirty="0"/>
-          </a:p>
-        </p:txBody>
-      </p:sp>
-      <p:sp>
-        <p:nvSpPr>
-          <p:cNvPr id="17" name="Text 15"/>
-          <p:cNvSpPr/>
-          <p:nvPr/>
-        </p:nvSpPr>
-        <p:spPr>
-          <a:xfrm>
-            <a:off x="6446520" y="3584448"/>
-            <a:ext cx="5120640" cy="548640"/>
-          </a:xfrm>
-          <a:prstGeom prst="rect">
-            <a:avLst/>
-          </a:prstGeom>
-          <a:noFill/>
-          <a:ln/>
-        </p:spPr>
-        <p:txBody>
-          <a:bodyPr wrap="square" rtlCol="0" anchor="t"/>
-          <a:lstStyle/>
-          <a:p>
-            <a:pPr marL="0" indent="0">
-              <a:buNone/>
-            </a:pPr>
-            <a:r>
-              <a:rPr lang="en-US" sz="1250" dirty="0">
-                <a:solidFill>
-                  <a:srgbClr val="1B1F3B"/>
-                </a:solidFill>
-                <a:latin typeface="Calibri" pitchFamily="34" charset="0"/>
-                <a:ea typeface="Calibri" pitchFamily="34" charset="-122"/>
-                <a:cs typeface="Calibri" pitchFamily="34" charset="-120"/>
-              </a:rPr>
-              <a:t>f2() runs (still sync) → logs "f2"</a:t>
-            </a:r>
-            <a:endParaRPr lang="en-US" sz="1250" dirty="0"/>
-          </a:p>
-        </p:txBody>
-      </p:sp>
-      <p:sp>
-        <p:nvSpPr>
-          <p:cNvPr id="18" name="Shape 16"/>
-          <p:cNvSpPr/>
-          <p:nvPr/>
-        </p:nvSpPr>
-        <p:spPr>
-          <a:xfrm>
-            <a:off x="5989320" y="4270248"/>
-            <a:ext cx="292608" cy="292608"/>
-          </a:xfrm>
-          <a:prstGeom prst="ellipse">
-            <a:avLst/>
-          </a:prstGeom>
-          <a:solidFill>
-            <a:srgbClr val="F0DB4F"/>
-          </a:solidFill>
-          <a:ln/>
-        </p:spPr>
-      </p:sp>
-      <p:sp>
-        <p:nvSpPr>
-          <p:cNvPr id="19" name="Text 17"/>
-          <p:cNvSpPr/>
-          <p:nvPr/>
-        </p:nvSpPr>
-        <p:spPr>
-          <a:xfrm>
-            <a:off x="5989320" y="4270248"/>
-            <a:ext cx="292608" cy="292608"/>
-          </a:xfrm>
-          <a:prstGeom prst="rect">
-            <a:avLst/>
-          </a:prstGeom>
-          <a:noFill/>
-          <a:ln/>
-        </p:spPr>
-        <p:txBody>
-          <a:bodyPr wrap="square" rtlCol="0" anchor="ctr"/>
-          <a:lstStyle/>
-          <a:p>
-            <a:pPr marL="0" indent="0" algn="ctr">
-              <a:buNone/>
-            </a:pPr>
-            <a:r>
-              <a:rPr lang="en-US" sz="1200" b="1" dirty="0">
-                <a:solidFill>
-                  <a:srgbClr val="1B1F3B"/>
-                </a:solidFill>
-                <a:latin typeface="Calibri" pitchFamily="34" charset="0"/>
-                <a:ea typeface="Calibri" pitchFamily="34" charset="-122"/>
-                <a:cs typeface="Calibri" pitchFamily="34" charset="-120"/>
-              </a:rPr>
-              <a:t>5</a:t>
-            </a:r>
-            <a:endParaRPr lang="en-US" sz="1200" dirty="0"/>
-          </a:p>
-        </p:txBody>
-      </p:sp>
-      <p:sp>
-        <p:nvSpPr>
-          <p:cNvPr id="20" name="Text 18"/>
-          <p:cNvSpPr/>
-          <p:nvPr/>
-        </p:nvSpPr>
-        <p:spPr>
-          <a:xfrm>
-            <a:off x="6446520" y="4187952"/>
-            <a:ext cx="5120640" cy="548640"/>
-          </a:xfrm>
-          <a:prstGeom prst="rect">
-            <a:avLst/>
-          </a:prstGeom>
-          <a:noFill/>
-          <a:ln/>
-        </p:spPr>
-        <p:txBody>
-          <a:bodyPr wrap="square" rtlCol="0" anchor="t"/>
-          <a:lstStyle/>
-          <a:p>
-            <a:pPr marL="0" indent="0">
-              <a:buNone/>
-            </a:pPr>
-            <a:r>
-              <a:rPr lang="en-US" sz="1250" dirty="0">
-                <a:solidFill>
-                  <a:srgbClr val="1B1F3B"/>
-                </a:solidFill>
-                <a:latin typeface="Calibri" pitchFamily="34" charset="0"/>
-                <a:ea typeface="Calibri" pitchFamily="34" charset="-122"/>
-                <a:cs typeface="Calibri" pitchFamily="34" charset="-120"/>
-              </a:rPr>
-              <a:t>Stack empty → Job Queue wins → logs "I am a promise"</a:t>
-            </a:r>
-            <a:endParaRPr lang="en-US" sz="1250" dirty="0"/>
-          </a:p>
-        </p:txBody>
-      </p:sp>
-      <p:sp>
-        <p:nvSpPr>
-          <p:cNvPr id="21" name="Shape 19"/>
-          <p:cNvSpPr/>
-          <p:nvPr/>
-        </p:nvSpPr>
-        <p:spPr>
-          <a:xfrm>
-            <a:off x="5989320" y="4873752"/>
-            <a:ext cx="292608" cy="292608"/>
-          </a:xfrm>
-          <a:prstGeom prst="ellipse">
-            <a:avLst/>
-          </a:prstGeom>
-          <a:solidFill>
-            <a:srgbClr val="F0DB4F"/>
-          </a:solidFill>
-          <a:ln/>
-        </p:spPr>
-      </p:sp>
-      <p:sp>
-        <p:nvSpPr>
-          <p:cNvPr id="22" name="Text 20"/>
-          <p:cNvSpPr/>
-          <p:nvPr/>
-        </p:nvSpPr>
-        <p:spPr>
-          <a:xfrm>
-            <a:off x="5989320" y="4873752"/>
-            <a:ext cx="292608" cy="292608"/>
-          </a:xfrm>
-          <a:prstGeom prst="rect">
-            <a:avLst/>
-          </a:prstGeom>
-          <a:noFill/>
-          <a:ln/>
-        </p:spPr>
-        <p:txBody>
-          <a:bodyPr wrap="square" rtlCol="0" anchor="ctr"/>
-          <a:lstStyle/>
-          <a:p>
-            <a:pPr marL="0" indent="0" algn="ctr">
-              <a:buNone/>
-            </a:pPr>
-            <a:r>
-              <a:rPr lang="en-US" sz="1200" b="1" dirty="0">
-                <a:solidFill>
-                  <a:srgbClr val="1B1F3B"/>
-                </a:solidFill>
-                <a:latin typeface="Calibri" pitchFamily="34" charset="0"/>
-                <a:ea typeface="Calibri" pitchFamily="34" charset="-122"/>
-                <a:cs typeface="Calibri" pitchFamily="34" charset="-120"/>
-              </a:rPr>
-              <a:t>6</a:t>
-            </a:r>
-            <a:endParaRPr lang="en-US" sz="1200" dirty="0"/>
-          </a:p>
-        </p:txBody>
-      </p:sp>
-      <p:sp>
-        <p:nvSpPr>
-          <p:cNvPr id="23" name="Text 21"/>
-          <p:cNvSpPr/>
-          <p:nvPr/>
-        </p:nvSpPr>
-        <p:spPr>
-          <a:xfrm>
-            <a:off x="6446520" y="4791456"/>
-            <a:ext cx="5120640" cy="548640"/>
-          </a:xfrm>
-          <a:prstGeom prst="rect">
-            <a:avLst/>
-          </a:prstGeom>
-          <a:noFill/>
-          <a:ln/>
-        </p:spPr>
-        <p:txBody>
-          <a:bodyPr wrap="square" rtlCol="0" anchor="t"/>
-          <a:lstStyle/>
-          <a:p>
-            <a:pPr marL="0" indent="0">
-              <a:buNone/>
-            </a:pPr>
-            <a:r>
-              <a:rPr lang="en-US" sz="1250" dirty="0">
-                <a:solidFill>
-                  <a:srgbClr val="1B1F3B"/>
-                </a:solidFill>
-                <a:latin typeface="Calibri" pitchFamily="34" charset="0"/>
-                <a:ea typeface="Calibri" pitchFamily="34" charset="-122"/>
-                <a:cs typeface="Calibri" pitchFamily="34" charset="-120"/>
-              </a:rPr>
-              <a:t>Job Queue empty → Callback Queue → logs "f1"</a:t>
-            </a:r>
-            <a:endParaRPr lang="en-US" sz="1250" dirty="0"/>
-          </a:p>
-        </p:txBody>
-      </p:sp>
-      <p:sp>
-        <p:nvSpPr>
-          <p:cNvPr id="24" name="Shape 22"/>
-          <p:cNvSpPr/>
-          <p:nvPr/>
-        </p:nvSpPr>
-        <p:spPr>
-          <a:xfrm>
-            <a:off x="5989320" y="5532120"/>
-            <a:ext cx="5577840" cy="457200"/>
-          </a:xfrm>
-          <a:prstGeom prst="roundRect">
-            <a:avLst>
-              <a:gd name="adj" fmla="val 16000"/>
-            </a:avLst>
-          </a:prstGeom>
-          <a:solidFill>
-            <a:srgbClr val="F0DB4F"/>
-          </a:solidFill>
-          <a:ln/>
-        </p:spPr>
-      </p:sp>
-      <p:sp>
-        <p:nvSpPr>
-          <p:cNvPr id="25" name="Text 23"/>
-          <p:cNvSpPr/>
-          <p:nvPr/>
-        </p:nvSpPr>
-        <p:spPr>
-          <a:xfrm>
-            <a:off x="5989320" y="5532120"/>
-            <a:ext cx="5577840" cy="457200"/>
-          </a:xfrm>
-          <a:prstGeom prst="rect">
-            <a:avLst/>
-          </a:prstGeom>
-          <a:noFill/>
-          <a:ln/>
-        </p:spPr>
-        <p:txBody>
-          <a:bodyPr wrap="square" rtlCol="0" anchor="ctr"/>
-          <a:lstStyle/>
-          <a:p>
-            <a:pPr marL="0" indent="0" algn="ctr">
-              <a:buNone/>
-            </a:pPr>
-            <a:r>
-              <a:rPr lang="en-US" sz="1250" b="1" dirty="0">
-                <a:solidFill>
-                  <a:srgbClr val="1B1F3B"/>
-                </a:solidFill>
-                <a:latin typeface="Calibri" pitchFamily="34" charset="0"/>
-                <a:ea typeface="Calibri" pitchFamily="34" charset="-122"/>
-                <a:cs typeface="Calibri" pitchFamily="34" charset="-120"/>
-              </a:rPr>
-              <a:t>Output:  main → f2 → "I am a promise" → f1</a:t>
-            </a:r>
-            <a:endParaRPr lang="en-US" sz="1250" dirty="0"/>
           </a:p>
         </p:txBody>
       </p:sp>
